--- a/Docs/Bardakov_VKR_Final.pptx
+++ b/Docs/Bardakov_VKR_Final.pptx
@@ -5,7 +5,7 @@
     <p:sldMasterId id="2147483648" r:id="rId1"/>
   </p:sldMasterIdLst>
   <p:notesMasterIdLst>
-    <p:notesMasterId r:id="rId13"/>
+    <p:notesMasterId r:id="rId16"/>
   </p:notesMasterIdLst>
   <p:sldIdLst>
     <p:sldId id="256" r:id="rId2"/>
@@ -17,8 +17,11 @@
     <p:sldId id="261" r:id="rId8"/>
     <p:sldId id="263" r:id="rId9"/>
     <p:sldId id="265" r:id="rId10"/>
-    <p:sldId id="266" r:id="rId11"/>
-    <p:sldId id="267" r:id="rId12"/>
+    <p:sldId id="268" r:id="rId11"/>
+    <p:sldId id="266" r:id="rId12"/>
+    <p:sldId id="269" r:id="rId13"/>
+    <p:sldId id="267" r:id="rId14"/>
+    <p:sldId id="270" r:id="rId15"/>
   </p:sldIdLst>
   <p:sldSz cx="9144000" cy="5143500" type="screen16x9"/>
   <p:notesSz cx="5143500" cy="9144000"/>
@@ -1306,7 +1309,13 @@
   <p:cSld>
     <p:spTree>
       <p:nvGrpSpPr>
-        <p:cNvPr id="1" name=""/>
+        <p:cNvPr id="1" name="">
+          <a:extLst>
+            <a:ext uri="{FF2B5EF4-FFF2-40B4-BE49-F238E27FC236}">
+              <a16:creationId xmlns:a16="http://schemas.microsoft.com/office/drawing/2014/main" id="{BBC340DD-1E7A-6315-D44C-48D5073241EB}"/>
+            </a:ext>
+          </a:extLst>
+        </p:cNvPr>
         <p:cNvGrpSpPr/>
         <p:nvPr/>
       </p:nvGrpSpPr>
@@ -1320,7 +1329,13 @@
       </p:grpSpPr>
       <p:sp>
         <p:nvSpPr>
-          <p:cNvPr id="2" name="Slide Image Placeholder 1"/>
+          <p:cNvPr id="2" name="Slide Image Placeholder 1">
+            <a:extLst>
+              <a:ext uri="{FF2B5EF4-FFF2-40B4-BE49-F238E27FC236}">
+                <a16:creationId xmlns:a16="http://schemas.microsoft.com/office/drawing/2014/main" id="{D10F7F8C-1DC9-2724-5C33-E5CBA7937EEE}"/>
+              </a:ext>
+            </a:extLst>
+          </p:cNvPr>
           <p:cNvSpPr>
             <a:spLocks noGrp="1" noRot="1" noChangeAspect="1"/>
           </p:cNvSpPr>
@@ -1332,7 +1347,13 @@
       </p:sp>
       <p:sp>
         <p:nvSpPr>
-          <p:cNvPr id="3" name="Notes Placeholder 2"/>
+          <p:cNvPr id="3" name="Notes Placeholder 2">
+            <a:extLst>
+              <a:ext uri="{FF2B5EF4-FFF2-40B4-BE49-F238E27FC236}">
+                <a16:creationId xmlns:a16="http://schemas.microsoft.com/office/drawing/2014/main" id="{5306B8A0-50F1-A8DF-29A0-1231B596B57E}"/>
+              </a:ext>
+            </a:extLst>
+          </p:cNvPr>
           <p:cNvSpPr>
             <a:spLocks noGrp="1"/>
           </p:cNvSpPr>
@@ -1351,7 +1372,13 @@
       </p:sp>
       <p:sp>
         <p:nvSpPr>
-          <p:cNvPr id="4" name="Slide Number Placeholder 3"/>
+          <p:cNvPr id="4" name="Slide Number Placeholder 3">
+            <a:extLst>
+              <a:ext uri="{FF2B5EF4-FFF2-40B4-BE49-F238E27FC236}">
+                <a16:creationId xmlns:a16="http://schemas.microsoft.com/office/drawing/2014/main" id="{A7BB1D4D-0DEE-7349-5F2D-434F6843D1A0}"/>
+              </a:ext>
+            </a:extLst>
+          </p:cNvPr>
           <p:cNvSpPr>
             <a:spLocks noGrp="1"/>
           </p:cNvSpPr>
@@ -1375,7 +1402,7 @@
     </p:spTree>
     <p:extLst>
       <p:ext uri="{BB962C8B-B14F-4D97-AF65-F5344CB8AC3E}">
-        <p14:creationId xmlns:p14="http://schemas.microsoft.com/office/powerpoint/2010/main" val="1024086991"/>
+        <p14:creationId xmlns:p14="http://schemas.microsoft.com/office/powerpoint/2010/main" val="4292245982"/>
       </p:ext>
     </p:extLst>
   </p:cSld>
@@ -1460,6 +1487,306 @@
     <p:extLst>
       <p:ext uri="{BB962C8B-B14F-4D97-AF65-F5344CB8AC3E}">
         <p14:creationId xmlns:p14="http://schemas.microsoft.com/office/powerpoint/2010/main" val="1024086991"/>
+      </p:ext>
+    </p:extLst>
+  </p:cSld>
+  <p:clrMapOvr>
+    <a:masterClrMapping/>
+  </p:clrMapOvr>
+</p:notes>
+</file>
+
+<file path=ppt/notesSlides/notesSlide12.xml><?xml version="1.0" encoding="utf-8"?>
+<p:notes xmlns:a="http://schemas.openxmlformats.org/drawingml/2006/main" xmlns:r="http://schemas.openxmlformats.org/officeDocument/2006/relationships" xmlns:p="http://schemas.openxmlformats.org/presentationml/2006/main">
+  <p:cSld>
+    <p:spTree>
+      <p:nvGrpSpPr>
+        <p:cNvPr id="1" name="">
+          <a:extLst>
+            <a:ext uri="{FF2B5EF4-FFF2-40B4-BE49-F238E27FC236}">
+              <a16:creationId xmlns:a16="http://schemas.microsoft.com/office/drawing/2014/main" id="{5DCDC83D-76A0-FC18-8428-EAA324131173}"/>
+            </a:ext>
+          </a:extLst>
+        </p:cNvPr>
+        <p:cNvGrpSpPr/>
+        <p:nvPr/>
+      </p:nvGrpSpPr>
+      <p:grpSpPr>
+        <a:xfrm>
+          <a:off x="0" y="0"/>
+          <a:ext cx="0" cy="0"/>
+          <a:chOff x="0" y="0"/>
+          <a:chExt cx="0" cy="0"/>
+        </a:xfrm>
+      </p:grpSpPr>
+      <p:sp>
+        <p:nvSpPr>
+          <p:cNvPr id="2" name="Slide Image Placeholder 1">
+            <a:extLst>
+              <a:ext uri="{FF2B5EF4-FFF2-40B4-BE49-F238E27FC236}">
+                <a16:creationId xmlns:a16="http://schemas.microsoft.com/office/drawing/2014/main" id="{8AC2D117-403A-FBC8-8912-91DC299490AB}"/>
+              </a:ext>
+            </a:extLst>
+          </p:cNvPr>
+          <p:cNvSpPr>
+            <a:spLocks noGrp="1" noRot="1" noChangeAspect="1"/>
+          </p:cNvSpPr>
+          <p:nvPr>
+            <p:ph type="sldImg"/>
+          </p:nvPr>
+        </p:nvSpPr>
+        <p:spPr/>
+      </p:sp>
+      <p:sp>
+        <p:nvSpPr>
+          <p:cNvPr id="3" name="Notes Placeholder 2">
+            <a:extLst>
+              <a:ext uri="{FF2B5EF4-FFF2-40B4-BE49-F238E27FC236}">
+                <a16:creationId xmlns:a16="http://schemas.microsoft.com/office/drawing/2014/main" id="{E053699C-2B9C-ABC0-3DBB-3605E90C4D63}"/>
+              </a:ext>
+            </a:extLst>
+          </p:cNvPr>
+          <p:cNvSpPr>
+            <a:spLocks noGrp="1"/>
+          </p:cNvSpPr>
+          <p:nvPr>
+            <p:ph type="body" idx="1"/>
+          </p:nvPr>
+        </p:nvSpPr>
+        <p:spPr/>
+        <p:txBody>
+          <a:bodyPr/>
+          <a:lstStyle/>
+          <a:p>
+            <a:endParaRPr lang="en-US" dirty="0"/>
+          </a:p>
+        </p:txBody>
+      </p:sp>
+      <p:sp>
+        <p:nvSpPr>
+          <p:cNvPr id="4" name="Slide Number Placeholder 3">
+            <a:extLst>
+              <a:ext uri="{FF2B5EF4-FFF2-40B4-BE49-F238E27FC236}">
+                <a16:creationId xmlns:a16="http://schemas.microsoft.com/office/drawing/2014/main" id="{FCF1530C-80C5-6877-9F17-5240E240F391}"/>
+              </a:ext>
+            </a:extLst>
+          </p:cNvPr>
+          <p:cNvSpPr>
+            <a:spLocks noGrp="1"/>
+          </p:cNvSpPr>
+          <p:nvPr>
+            <p:ph type="sldNum" sz="quarter" idx="10"/>
+          </p:nvPr>
+        </p:nvSpPr>
+        <p:spPr/>
+        <p:txBody>
+          <a:bodyPr/>
+          <a:lstStyle/>
+          <a:p>
+            <a:fld id="{F7021451-1387-4CA6-816F-3879F97B5CBC}" type="slidenum">
+              <a:rPr lang="en-US"/>
+              <a:t>12</a:t>
+            </a:fld>
+            <a:endParaRPr lang="en-US"/>
+          </a:p>
+        </p:txBody>
+      </p:sp>
+    </p:spTree>
+    <p:extLst>
+      <p:ext uri="{BB962C8B-B14F-4D97-AF65-F5344CB8AC3E}">
+        <p14:creationId xmlns:p14="http://schemas.microsoft.com/office/powerpoint/2010/main" val="1968441176"/>
+      </p:ext>
+    </p:extLst>
+  </p:cSld>
+  <p:clrMapOvr>
+    <a:masterClrMapping/>
+  </p:clrMapOvr>
+</p:notes>
+</file>
+
+<file path=ppt/notesSlides/notesSlide13.xml><?xml version="1.0" encoding="utf-8"?>
+<p:notes xmlns:a="http://schemas.openxmlformats.org/drawingml/2006/main" xmlns:r="http://schemas.openxmlformats.org/officeDocument/2006/relationships" xmlns:p="http://schemas.openxmlformats.org/presentationml/2006/main">
+  <p:cSld>
+    <p:spTree>
+      <p:nvGrpSpPr>
+        <p:cNvPr id="1" name=""/>
+        <p:cNvGrpSpPr/>
+        <p:nvPr/>
+      </p:nvGrpSpPr>
+      <p:grpSpPr>
+        <a:xfrm>
+          <a:off x="0" y="0"/>
+          <a:ext cx="0" cy="0"/>
+          <a:chOff x="0" y="0"/>
+          <a:chExt cx="0" cy="0"/>
+        </a:xfrm>
+      </p:grpSpPr>
+      <p:sp>
+        <p:nvSpPr>
+          <p:cNvPr id="2" name="Slide Image Placeholder 1"/>
+          <p:cNvSpPr>
+            <a:spLocks noGrp="1" noRot="1" noChangeAspect="1"/>
+          </p:cNvSpPr>
+          <p:nvPr>
+            <p:ph type="sldImg"/>
+          </p:nvPr>
+        </p:nvSpPr>
+        <p:spPr/>
+      </p:sp>
+      <p:sp>
+        <p:nvSpPr>
+          <p:cNvPr id="3" name="Notes Placeholder 2"/>
+          <p:cNvSpPr>
+            <a:spLocks noGrp="1"/>
+          </p:cNvSpPr>
+          <p:nvPr>
+            <p:ph type="body" idx="1"/>
+          </p:nvPr>
+        </p:nvSpPr>
+        <p:spPr/>
+        <p:txBody>
+          <a:bodyPr/>
+          <a:lstStyle/>
+          <a:p>
+            <a:endParaRPr lang="en-US" dirty="0"/>
+          </a:p>
+        </p:txBody>
+      </p:sp>
+      <p:sp>
+        <p:nvSpPr>
+          <p:cNvPr id="4" name="Slide Number Placeholder 3"/>
+          <p:cNvSpPr>
+            <a:spLocks noGrp="1"/>
+          </p:cNvSpPr>
+          <p:nvPr>
+            <p:ph type="sldNum" sz="quarter" idx="10"/>
+          </p:nvPr>
+        </p:nvSpPr>
+        <p:spPr/>
+        <p:txBody>
+          <a:bodyPr/>
+          <a:lstStyle/>
+          <a:p>
+            <a:fld id="{F7021451-1387-4CA6-816F-3879F97B5CBC}" type="slidenum">
+              <a:rPr lang="en-US"/>
+              <a:t>13</a:t>
+            </a:fld>
+            <a:endParaRPr lang="en-US"/>
+          </a:p>
+        </p:txBody>
+      </p:sp>
+    </p:spTree>
+    <p:extLst>
+      <p:ext uri="{BB962C8B-B14F-4D97-AF65-F5344CB8AC3E}">
+        <p14:creationId xmlns:p14="http://schemas.microsoft.com/office/powerpoint/2010/main" val="1024086991"/>
+      </p:ext>
+    </p:extLst>
+  </p:cSld>
+  <p:clrMapOvr>
+    <a:masterClrMapping/>
+  </p:clrMapOvr>
+</p:notes>
+</file>
+
+<file path=ppt/notesSlides/notesSlide14.xml><?xml version="1.0" encoding="utf-8"?>
+<p:notes xmlns:a="http://schemas.openxmlformats.org/drawingml/2006/main" xmlns:r="http://schemas.openxmlformats.org/officeDocument/2006/relationships" xmlns:p="http://schemas.openxmlformats.org/presentationml/2006/main">
+  <p:cSld>
+    <p:spTree>
+      <p:nvGrpSpPr>
+        <p:cNvPr id="1" name="">
+          <a:extLst>
+            <a:ext uri="{FF2B5EF4-FFF2-40B4-BE49-F238E27FC236}">
+              <a16:creationId xmlns:a16="http://schemas.microsoft.com/office/drawing/2014/main" id="{2451410D-BD67-733E-2475-CC9084BC1D58}"/>
+            </a:ext>
+          </a:extLst>
+        </p:cNvPr>
+        <p:cNvGrpSpPr/>
+        <p:nvPr/>
+      </p:nvGrpSpPr>
+      <p:grpSpPr>
+        <a:xfrm>
+          <a:off x="0" y="0"/>
+          <a:ext cx="0" cy="0"/>
+          <a:chOff x="0" y="0"/>
+          <a:chExt cx="0" cy="0"/>
+        </a:xfrm>
+      </p:grpSpPr>
+      <p:sp>
+        <p:nvSpPr>
+          <p:cNvPr id="2" name="Slide Image Placeholder 1">
+            <a:extLst>
+              <a:ext uri="{FF2B5EF4-FFF2-40B4-BE49-F238E27FC236}">
+                <a16:creationId xmlns:a16="http://schemas.microsoft.com/office/drawing/2014/main" id="{D79A3C43-4881-B1A8-955D-1EFDF09BAB2F}"/>
+              </a:ext>
+            </a:extLst>
+          </p:cNvPr>
+          <p:cNvSpPr>
+            <a:spLocks noGrp="1" noRot="1" noChangeAspect="1"/>
+          </p:cNvSpPr>
+          <p:nvPr>
+            <p:ph type="sldImg"/>
+          </p:nvPr>
+        </p:nvSpPr>
+        <p:spPr/>
+      </p:sp>
+      <p:sp>
+        <p:nvSpPr>
+          <p:cNvPr id="3" name="Notes Placeholder 2">
+            <a:extLst>
+              <a:ext uri="{FF2B5EF4-FFF2-40B4-BE49-F238E27FC236}">
+                <a16:creationId xmlns:a16="http://schemas.microsoft.com/office/drawing/2014/main" id="{EEBBE1F5-946C-E0F2-988D-FC24CA2EFCEA}"/>
+              </a:ext>
+            </a:extLst>
+          </p:cNvPr>
+          <p:cNvSpPr>
+            <a:spLocks noGrp="1"/>
+          </p:cNvSpPr>
+          <p:nvPr>
+            <p:ph type="body" idx="1"/>
+          </p:nvPr>
+        </p:nvSpPr>
+        <p:spPr/>
+        <p:txBody>
+          <a:bodyPr/>
+          <a:lstStyle/>
+          <a:p>
+            <a:endParaRPr lang="en-US" dirty="0"/>
+          </a:p>
+        </p:txBody>
+      </p:sp>
+      <p:sp>
+        <p:nvSpPr>
+          <p:cNvPr id="4" name="Slide Number Placeholder 3">
+            <a:extLst>
+              <a:ext uri="{FF2B5EF4-FFF2-40B4-BE49-F238E27FC236}">
+                <a16:creationId xmlns:a16="http://schemas.microsoft.com/office/drawing/2014/main" id="{723E7983-965D-52FB-B57A-B1FB07F5ADE4}"/>
+              </a:ext>
+            </a:extLst>
+          </p:cNvPr>
+          <p:cNvSpPr>
+            <a:spLocks noGrp="1"/>
+          </p:cNvSpPr>
+          <p:nvPr>
+            <p:ph type="sldNum" sz="quarter" idx="10"/>
+          </p:nvPr>
+        </p:nvSpPr>
+        <p:spPr/>
+        <p:txBody>
+          <a:bodyPr/>
+          <a:lstStyle/>
+          <a:p>
+            <a:fld id="{F7021451-1387-4CA6-816F-3879F97B5CBC}" type="slidenum">
+              <a:rPr lang="en-US"/>
+              <a:t>14</a:t>
+            </a:fld>
+            <a:endParaRPr lang="en-US"/>
+          </a:p>
+        </p:txBody>
+      </p:sp>
+    </p:spTree>
+    <p:extLst>
+      <p:ext uri="{BB962C8B-B14F-4D97-AF65-F5344CB8AC3E}">
+        <p14:creationId xmlns:p14="http://schemas.microsoft.com/office/powerpoint/2010/main" val="2357755370"/>
       </p:ext>
     </p:extLst>
   </p:cSld>
@@ -2779,7 +3106,29 @@
                 <a:ea typeface="Calibri" pitchFamily="34" charset="-122"/>
                 <a:cs typeface="Calibri" pitchFamily="34" charset="-120"/>
               </a:rPr>
-              <a:t>Бардаков Дмитрий Александрович, гр. 4.205-2</a:t>
+              <a:t>Бардаков Дмитрий Александрович, </a:t>
+            </a:r>
+            <a:r>
+              <a:rPr lang="ru-RU" sz="1300" dirty="0">
+                <a:solidFill>
+                  <a:srgbClr val="1A1A1A"/>
+                </a:solidFill>
+                <a:latin typeface="Calibri" pitchFamily="34" charset="0"/>
+                <a:ea typeface="Calibri" pitchFamily="34" charset="-122"/>
+                <a:cs typeface="Calibri" pitchFamily="34" charset="-120"/>
+              </a:rPr>
+              <a:t>группа</a:t>
+            </a:r>
+            <a:r>
+              <a:rPr lang="en-US" sz="1300" dirty="0">
+                <a:solidFill>
+                  <a:srgbClr val="1A1A1A"/>
+                </a:solidFill>
+                <a:latin typeface="Calibri" pitchFamily="34" charset="0"/>
+                <a:ea typeface="Calibri" pitchFamily="34" charset="-122"/>
+                <a:cs typeface="Calibri" pitchFamily="34" charset="-120"/>
+              </a:rPr>
+              <a:t> 4.205-2</a:t>
             </a:r>
             <a:endParaRPr lang="en-US" sz="1300" dirty="0"/>
           </a:p>
@@ -2806,9 +3155,17 @@
           <a:bodyPr wrap="square" rtlCol="0" anchor="ctr"/>
           <a:lstStyle/>
           <a:p>
-            <a:pPr marL="0" indent="0">
-              <a:buNone/>
-            </a:pPr>
+            <a:r>
+              <a:rPr lang="ru-RU" sz="1300" dirty="0">
+                <a:solidFill>
+                  <a:srgbClr val="BFBFBF"/>
+                </a:solidFill>
+                <a:latin typeface="Calibri" pitchFamily="34" charset="0"/>
+                <a:ea typeface="Calibri" pitchFamily="34" charset="-122"/>
+                <a:cs typeface="Calibri" pitchFamily="34" charset="-120"/>
+              </a:rPr>
+              <a:t>Научный руководитель</a:t>
+            </a:r>
             <a:r>
               <a:rPr lang="en-US" sz="1300" dirty="0">
                 <a:solidFill>
@@ -2818,18 +3175,26 @@
                 <a:ea typeface="Calibri" pitchFamily="34" charset="-122"/>
                 <a:cs typeface="Calibri" pitchFamily="34" charset="-120"/>
               </a:rPr>
-              <a:t>Науч. руководитель:  </a:t>
-            </a:r>
-            <a:r>
-              <a:rPr lang="en-US" sz="1300" dirty="0">
-                <a:solidFill>
-                  <a:srgbClr val="1A1A1A"/>
-                </a:solidFill>
-                <a:latin typeface="Calibri" pitchFamily="34" charset="0"/>
-                <a:ea typeface="Calibri" pitchFamily="34" charset="-122"/>
-                <a:cs typeface="Calibri" pitchFamily="34" charset="-120"/>
-              </a:rPr>
-              <a:t>____________ (степень, звание, Ф.И.О.)</a:t>
+              <a:t>:</a:t>
+            </a:r>
+            <a:r>
+              <a:rPr lang="ru-RU" sz="1300" dirty="0">
+                <a:solidFill>
+                  <a:srgbClr val="BFBFBF"/>
+                </a:solidFill>
+                <a:latin typeface="Calibri" pitchFamily="34" charset="0"/>
+                <a:ea typeface="Calibri" pitchFamily="34" charset="-122"/>
+                <a:cs typeface="Calibri" pitchFamily="34" charset="-120"/>
+              </a:rPr>
+              <a:t> </a:t>
+            </a:r>
+            <a:r>
+              <a:rPr lang="ru-RU" sz="1300" dirty="0">
+                <a:latin typeface="Calibri" pitchFamily="34" charset="0"/>
+                <a:ea typeface="Calibri" pitchFamily="34" charset="-122"/>
+                <a:cs typeface="Calibri" pitchFamily="34" charset="-120"/>
+              </a:rPr>
+              <a:t>Михеева Т.В., к.т.н., доцент кафедры информатики</a:t>
             </a:r>
             <a:endParaRPr lang="en-US" sz="1300" dirty="0"/>
           </a:p>
@@ -2958,6 +3323,303 @@
 </file>
 
 <file path=ppt/slides/slide10.xml><?xml version="1.0" encoding="utf-8"?>
+<p:sld xmlns:a="http://schemas.openxmlformats.org/drawingml/2006/main" xmlns:r="http://schemas.openxmlformats.org/officeDocument/2006/relationships" xmlns:p="http://schemas.openxmlformats.org/presentationml/2006/main">
+  <p:cSld>
+    <p:bg>
+      <p:bgPr>
+        <a:solidFill>
+          <a:srgbClr val="FFFFFF"/>
+        </a:solidFill>
+        <a:effectLst/>
+      </p:bgPr>
+    </p:bg>
+    <p:spTree>
+      <p:nvGrpSpPr>
+        <p:cNvPr id="1" name="">
+          <a:extLst>
+            <a:ext uri="{FF2B5EF4-FFF2-40B4-BE49-F238E27FC236}">
+              <a16:creationId xmlns:a16="http://schemas.microsoft.com/office/drawing/2014/main" id="{F981B013-4DE1-6EBB-32B1-24305DA56796}"/>
+            </a:ext>
+          </a:extLst>
+        </p:cNvPr>
+        <p:cNvGrpSpPr/>
+        <p:nvPr/>
+      </p:nvGrpSpPr>
+      <p:grpSpPr>
+        <a:xfrm>
+          <a:off x="0" y="0"/>
+          <a:ext cx="0" cy="0"/>
+          <a:chOff x="0" y="0"/>
+          <a:chExt cx="0" cy="0"/>
+        </a:xfrm>
+      </p:grpSpPr>
+      <p:sp>
+        <p:nvSpPr>
+          <p:cNvPr id="2" name="Shape 0">
+            <a:extLst>
+              <a:ext uri="{FF2B5EF4-FFF2-40B4-BE49-F238E27FC236}">
+                <a16:creationId xmlns:a16="http://schemas.microsoft.com/office/drawing/2014/main" id="{47B81BB7-962D-8DCD-EAAC-913628B8CC10}"/>
+              </a:ext>
+            </a:extLst>
+          </p:cNvPr>
+          <p:cNvSpPr/>
+          <p:nvPr/>
+        </p:nvSpPr>
+        <p:spPr>
+          <a:xfrm>
+            <a:off x="0" y="0"/>
+            <a:ext cx="9144000" cy="658368"/>
+          </a:xfrm>
+          <a:prstGeom prst="rect">
+            <a:avLst/>
+          </a:prstGeom>
+          <a:solidFill>
+            <a:srgbClr val="1F3864"/>
+          </a:solidFill>
+          <a:ln w="12700">
+            <a:solidFill>
+              <a:srgbClr val="1F3864"/>
+            </a:solidFill>
+            <a:prstDash val="solid"/>
+          </a:ln>
+        </p:spPr>
+      </p:sp>
+      <p:sp>
+        <p:nvSpPr>
+          <p:cNvPr id="3" name="Text 1">
+            <a:extLst>
+              <a:ext uri="{FF2B5EF4-FFF2-40B4-BE49-F238E27FC236}">
+                <a16:creationId xmlns:a16="http://schemas.microsoft.com/office/drawing/2014/main" id="{E77B984D-EA6F-C229-7EB4-D90705F57366}"/>
+              </a:ext>
+            </a:extLst>
+          </p:cNvPr>
+          <p:cNvSpPr/>
+          <p:nvPr/>
+        </p:nvSpPr>
+        <p:spPr>
+          <a:xfrm>
+            <a:off x="274320" y="36576"/>
+            <a:ext cx="8229600" cy="585216"/>
+          </a:xfrm>
+          <a:prstGeom prst="rect">
+            <a:avLst/>
+          </a:prstGeom>
+          <a:noFill/>
+          <a:ln/>
+        </p:spPr>
+        <p:txBody>
+          <a:bodyPr wrap="square" lIns="0" tIns="0" rIns="0" bIns="0" rtlCol="0" anchor="ctr"/>
+          <a:lstStyle/>
+          <a:p>
+            <a:pPr marL="0" indent="0" algn="l">
+              <a:buNone/>
+            </a:pPr>
+            <a:r>
+              <a:rPr lang="ru-RU" sz="2000" b="1" dirty="0">
+                <a:solidFill>
+                  <a:srgbClr val="FFFFFF"/>
+                </a:solidFill>
+                <a:latin typeface="Calibri" pitchFamily="34" charset="0"/>
+                <a:ea typeface="Calibri" pitchFamily="34" charset="-122"/>
+                <a:cs typeface="Calibri" pitchFamily="34" charset="-120"/>
+              </a:rPr>
+              <a:t>Примеры использования библиотеки </a:t>
+            </a:r>
+            <a:r>
+              <a:rPr lang="en-US" sz="2000" b="1" dirty="0">
+                <a:solidFill>
+                  <a:srgbClr val="FFFFFF"/>
+                </a:solidFill>
+                <a:latin typeface="Calibri" pitchFamily="34" charset="0"/>
+                <a:ea typeface="Calibri" pitchFamily="34" charset="-122"/>
+                <a:cs typeface="Calibri" pitchFamily="34" charset="-120"/>
+              </a:rPr>
+              <a:t>Google OR-tools</a:t>
+            </a:r>
+            <a:endParaRPr lang="en-US" sz="2000" dirty="0"/>
+          </a:p>
+        </p:txBody>
+      </p:sp>
+      <p:sp>
+        <p:nvSpPr>
+          <p:cNvPr id="4" name="Text 2">
+            <a:extLst>
+              <a:ext uri="{FF2B5EF4-FFF2-40B4-BE49-F238E27FC236}">
+                <a16:creationId xmlns:a16="http://schemas.microsoft.com/office/drawing/2014/main" id="{7926163B-FAD2-BC71-32E6-E0356C100706}"/>
+              </a:ext>
+            </a:extLst>
+          </p:cNvPr>
+          <p:cNvSpPr/>
+          <p:nvPr/>
+        </p:nvSpPr>
+        <p:spPr>
+          <a:xfrm>
+            <a:off x="8595360" y="4846320"/>
+            <a:ext cx="457200" cy="228600"/>
+          </a:xfrm>
+          <a:prstGeom prst="rect">
+            <a:avLst/>
+          </a:prstGeom>
+          <a:noFill/>
+          <a:ln/>
+        </p:spPr>
+        <p:txBody>
+          <a:bodyPr wrap="square" rtlCol="0" anchor="ctr"/>
+          <a:lstStyle/>
+          <a:p>
+            <a:pPr marL="0" indent="0" algn="r">
+              <a:buNone/>
+            </a:pPr>
+            <a:r>
+              <a:rPr lang="en-US" sz="1100" dirty="0">
+                <a:solidFill>
+                  <a:srgbClr val="BFBFBF"/>
+                </a:solidFill>
+                <a:latin typeface="Calibri" pitchFamily="34" charset="0"/>
+                <a:ea typeface="Calibri" pitchFamily="34" charset="-122"/>
+                <a:cs typeface="Calibri" pitchFamily="34" charset="-120"/>
+              </a:rPr>
+              <a:t>10</a:t>
+            </a:r>
+            <a:endParaRPr lang="en-US" sz="1100" dirty="0"/>
+          </a:p>
+        </p:txBody>
+      </p:sp>
+      <p:sp>
+        <p:nvSpPr>
+          <p:cNvPr id="5" name="Shape 3">
+            <a:extLst>
+              <a:ext uri="{FF2B5EF4-FFF2-40B4-BE49-F238E27FC236}">
+                <a16:creationId xmlns:a16="http://schemas.microsoft.com/office/drawing/2014/main" id="{712D8ADA-4F28-FBF5-E48F-D885D5AC1C13}"/>
+              </a:ext>
+            </a:extLst>
+          </p:cNvPr>
+          <p:cNvSpPr/>
+          <p:nvPr/>
+        </p:nvSpPr>
+        <p:spPr>
+          <a:xfrm>
+            <a:off x="0" y="5074920"/>
+            <a:ext cx="9144000" cy="68580"/>
+          </a:xfrm>
+          <a:prstGeom prst="rect">
+            <a:avLst/>
+          </a:prstGeom>
+          <a:solidFill>
+            <a:srgbClr val="2E75B6"/>
+          </a:solidFill>
+          <a:ln w="12700">
+            <a:solidFill>
+              <a:srgbClr val="2E75B6"/>
+            </a:solidFill>
+            <a:prstDash val="solid"/>
+          </a:ln>
+        </p:spPr>
+      </p:sp>
+      <p:pic>
+        <p:nvPicPr>
+          <p:cNvPr id="36" name="Рисунок 35">
+            <a:extLst>
+              <a:ext uri="{FF2B5EF4-FFF2-40B4-BE49-F238E27FC236}">
+                <a16:creationId xmlns:a16="http://schemas.microsoft.com/office/drawing/2014/main" id="{B1FF2E00-1BE8-5507-1286-FE30103CFC9F}"/>
+              </a:ext>
+            </a:extLst>
+          </p:cNvPr>
+          <p:cNvPicPr>
+            <a:picLocks noChangeAspect="1"/>
+          </p:cNvPicPr>
+          <p:nvPr/>
+        </p:nvPicPr>
+        <p:blipFill>
+          <a:blip r:embed="rId3"/>
+          <a:stretch>
+            <a:fillRect/>
+          </a:stretch>
+        </p:blipFill>
+        <p:spPr>
+          <a:xfrm>
+            <a:off x="274320" y="763524"/>
+            <a:ext cx="6322423" cy="1819213"/>
+          </a:xfrm>
+          <a:prstGeom prst="rect">
+            <a:avLst/>
+          </a:prstGeom>
+        </p:spPr>
+      </p:pic>
+      <p:pic>
+        <p:nvPicPr>
+          <p:cNvPr id="38" name="Рисунок 37">
+            <a:extLst>
+              <a:ext uri="{FF2B5EF4-FFF2-40B4-BE49-F238E27FC236}">
+                <a16:creationId xmlns:a16="http://schemas.microsoft.com/office/drawing/2014/main" id="{A1AB95C9-6292-B254-BD73-043710B05E61}"/>
+              </a:ext>
+            </a:extLst>
+          </p:cNvPr>
+          <p:cNvPicPr>
+            <a:picLocks noChangeAspect="1"/>
+          </p:cNvPicPr>
+          <p:nvPr/>
+        </p:nvPicPr>
+        <p:blipFill>
+          <a:blip r:embed="rId4"/>
+          <a:stretch>
+            <a:fillRect/>
+          </a:stretch>
+        </p:blipFill>
+        <p:spPr>
+          <a:xfrm>
+            <a:off x="274320" y="2687893"/>
+            <a:ext cx="3759507" cy="2083413"/>
+          </a:xfrm>
+          <a:prstGeom prst="rect">
+            <a:avLst/>
+          </a:prstGeom>
+        </p:spPr>
+      </p:pic>
+      <p:pic>
+        <p:nvPicPr>
+          <p:cNvPr id="40" name="Рисунок 39">
+            <a:extLst>
+              <a:ext uri="{FF2B5EF4-FFF2-40B4-BE49-F238E27FC236}">
+                <a16:creationId xmlns:a16="http://schemas.microsoft.com/office/drawing/2014/main" id="{E533C8F7-EA1F-EB64-A28F-CCB4ED896DB1}"/>
+              </a:ext>
+            </a:extLst>
+          </p:cNvPr>
+          <p:cNvPicPr>
+            <a:picLocks noChangeAspect="1"/>
+          </p:cNvPicPr>
+          <p:nvPr/>
+        </p:nvPicPr>
+        <p:blipFill>
+          <a:blip r:embed="rId5"/>
+          <a:stretch>
+            <a:fillRect/>
+          </a:stretch>
+        </p:blipFill>
+        <p:spPr>
+          <a:xfrm>
+            <a:off x="4109295" y="2687893"/>
+            <a:ext cx="4760385" cy="1703397"/>
+          </a:xfrm>
+          <a:prstGeom prst="rect">
+            <a:avLst/>
+          </a:prstGeom>
+        </p:spPr>
+      </p:pic>
+    </p:spTree>
+    <p:extLst>
+      <p:ext uri="{BB962C8B-B14F-4D97-AF65-F5344CB8AC3E}">
+        <p14:creationId xmlns:p14="http://schemas.microsoft.com/office/powerpoint/2010/main" val="3817076146"/>
+      </p:ext>
+    </p:extLst>
+  </p:cSld>
+  <p:clrMapOvr>
+    <a:masterClrMapping/>
+  </p:clrMapOvr>
+</p:sld>
+</file>
+
+<file path=ppt/slides/slide11.xml><?xml version="1.0" encoding="utf-8"?>
 <p:sld xmlns:a="http://schemas.openxmlformats.org/drawingml/2006/main" xmlns:r="http://schemas.openxmlformats.org/officeDocument/2006/relationships" xmlns:p="http://schemas.openxmlformats.org/presentationml/2006/main">
   <p:cSld name="Slide 11">
     <p:bg>
@@ -3986,7 +4648,271 @@
 </p:sld>
 </file>
 
-<file path=ppt/slides/slide11.xml><?xml version="1.0" encoding="utf-8"?>
+<file path=ppt/slides/slide12.xml><?xml version="1.0" encoding="utf-8"?>
+<p:sld xmlns:a="http://schemas.openxmlformats.org/drawingml/2006/main" xmlns:r="http://schemas.openxmlformats.org/officeDocument/2006/relationships" xmlns:p="http://schemas.openxmlformats.org/presentationml/2006/main">
+  <p:cSld>
+    <p:bg>
+      <p:bgPr>
+        <a:solidFill>
+          <a:srgbClr val="FFFFFF"/>
+        </a:solidFill>
+        <a:effectLst/>
+      </p:bgPr>
+    </p:bg>
+    <p:spTree>
+      <p:nvGrpSpPr>
+        <p:cNvPr id="1" name="">
+          <a:extLst>
+            <a:ext uri="{FF2B5EF4-FFF2-40B4-BE49-F238E27FC236}">
+              <a16:creationId xmlns:a16="http://schemas.microsoft.com/office/drawing/2014/main" id="{383E56DF-936D-9BB2-705F-6CB7ED2BC7F1}"/>
+            </a:ext>
+          </a:extLst>
+        </p:cNvPr>
+        <p:cNvGrpSpPr/>
+        <p:nvPr/>
+      </p:nvGrpSpPr>
+      <p:grpSpPr>
+        <a:xfrm>
+          <a:off x="0" y="0"/>
+          <a:ext cx="0" cy="0"/>
+          <a:chOff x="0" y="0"/>
+          <a:chExt cx="0" cy="0"/>
+        </a:xfrm>
+      </p:grpSpPr>
+      <p:sp>
+        <p:nvSpPr>
+          <p:cNvPr id="2" name="Shape 0">
+            <a:extLst>
+              <a:ext uri="{FF2B5EF4-FFF2-40B4-BE49-F238E27FC236}">
+                <a16:creationId xmlns:a16="http://schemas.microsoft.com/office/drawing/2014/main" id="{72970187-0ACD-5FB5-76FF-6C555753FA54}"/>
+              </a:ext>
+            </a:extLst>
+          </p:cNvPr>
+          <p:cNvSpPr/>
+          <p:nvPr/>
+        </p:nvSpPr>
+        <p:spPr>
+          <a:xfrm>
+            <a:off x="0" y="0"/>
+            <a:ext cx="9144000" cy="658368"/>
+          </a:xfrm>
+          <a:prstGeom prst="rect">
+            <a:avLst/>
+          </a:prstGeom>
+          <a:solidFill>
+            <a:srgbClr val="1F3864"/>
+          </a:solidFill>
+          <a:ln w="12700">
+            <a:solidFill>
+              <a:srgbClr val="1F3864"/>
+            </a:solidFill>
+            <a:prstDash val="solid"/>
+          </a:ln>
+        </p:spPr>
+      </p:sp>
+      <p:sp>
+        <p:nvSpPr>
+          <p:cNvPr id="3" name="Text 1">
+            <a:extLst>
+              <a:ext uri="{FF2B5EF4-FFF2-40B4-BE49-F238E27FC236}">
+                <a16:creationId xmlns:a16="http://schemas.microsoft.com/office/drawing/2014/main" id="{7F43AA0D-901C-CB86-1063-EA1CEA8A3D33}"/>
+              </a:ext>
+            </a:extLst>
+          </p:cNvPr>
+          <p:cNvSpPr/>
+          <p:nvPr/>
+        </p:nvSpPr>
+        <p:spPr>
+          <a:xfrm>
+            <a:off x="274320" y="36576"/>
+            <a:ext cx="8229600" cy="585216"/>
+          </a:xfrm>
+          <a:prstGeom prst="rect">
+            <a:avLst/>
+          </a:prstGeom>
+          <a:noFill/>
+          <a:ln/>
+        </p:spPr>
+        <p:txBody>
+          <a:bodyPr wrap="square" lIns="0" tIns="0" rIns="0" bIns="0" rtlCol="0" anchor="ctr"/>
+          <a:lstStyle/>
+          <a:p>
+            <a:pPr marL="0" indent="0" algn="l">
+              <a:buNone/>
+            </a:pPr>
+            <a:r>
+              <a:rPr lang="ru-RU" sz="2000" b="1" dirty="0">
+                <a:solidFill>
+                  <a:srgbClr val="FFFFFF"/>
+                </a:solidFill>
+                <a:latin typeface="Calibri" pitchFamily="34" charset="0"/>
+                <a:ea typeface="Calibri" pitchFamily="34" charset="-122"/>
+                <a:cs typeface="Calibri" pitchFamily="34" charset="-120"/>
+              </a:rPr>
+              <a:t>Примеры</a:t>
+            </a:r>
+            <a:r>
+              <a:rPr lang="en-US" sz="2000" b="1" dirty="0">
+                <a:solidFill>
+                  <a:srgbClr val="FFFFFF"/>
+                </a:solidFill>
+                <a:latin typeface="Calibri" pitchFamily="34" charset="0"/>
+                <a:ea typeface="Calibri" pitchFamily="34" charset="-122"/>
+                <a:cs typeface="Calibri" pitchFamily="34" charset="-120"/>
+              </a:rPr>
+              <a:t> </a:t>
+            </a:r>
+            <a:r>
+              <a:rPr lang="ru-RU" sz="2000" b="1" dirty="0">
+                <a:solidFill>
+                  <a:srgbClr val="FFFFFF"/>
+                </a:solidFill>
+                <a:latin typeface="Calibri" pitchFamily="34" charset="0"/>
+                <a:ea typeface="Calibri" pitchFamily="34" charset="-122"/>
+                <a:cs typeface="Calibri" pitchFamily="34" charset="-120"/>
+              </a:rPr>
+              <a:t>тестирования алгоритма создания расписания </a:t>
+            </a:r>
+            <a:endParaRPr lang="en-US" sz="2000" dirty="0"/>
+          </a:p>
+        </p:txBody>
+      </p:sp>
+      <p:sp>
+        <p:nvSpPr>
+          <p:cNvPr id="4" name="Text 2">
+            <a:extLst>
+              <a:ext uri="{FF2B5EF4-FFF2-40B4-BE49-F238E27FC236}">
+                <a16:creationId xmlns:a16="http://schemas.microsoft.com/office/drawing/2014/main" id="{2AA33428-4C64-6AF4-59E6-3DE41C362863}"/>
+              </a:ext>
+            </a:extLst>
+          </p:cNvPr>
+          <p:cNvSpPr/>
+          <p:nvPr/>
+        </p:nvSpPr>
+        <p:spPr>
+          <a:xfrm>
+            <a:off x="8595360" y="4846320"/>
+            <a:ext cx="457200" cy="228600"/>
+          </a:xfrm>
+          <a:prstGeom prst="rect">
+            <a:avLst/>
+          </a:prstGeom>
+          <a:noFill/>
+          <a:ln/>
+        </p:spPr>
+        <p:txBody>
+          <a:bodyPr wrap="square" rtlCol="0" anchor="ctr"/>
+          <a:lstStyle/>
+          <a:p>
+            <a:pPr marL="0" indent="0" algn="r">
+              <a:buNone/>
+            </a:pPr>
+            <a:r>
+              <a:rPr lang="en-US" sz="1100" dirty="0">
+                <a:solidFill>
+                  <a:srgbClr val="BFBFBF"/>
+                </a:solidFill>
+                <a:latin typeface="Calibri" pitchFamily="34" charset="0"/>
+                <a:ea typeface="Calibri" pitchFamily="34" charset="-122"/>
+                <a:cs typeface="Calibri" pitchFamily="34" charset="-120"/>
+              </a:rPr>
+              <a:t>1</a:t>
+            </a:r>
+            <a:r>
+              <a:rPr lang="ru-RU" sz="1100" dirty="0">
+                <a:solidFill>
+                  <a:srgbClr val="BFBFBF"/>
+                </a:solidFill>
+                <a:latin typeface="Calibri" pitchFamily="34" charset="0"/>
+                <a:ea typeface="Calibri" pitchFamily="34" charset="-122"/>
+                <a:cs typeface="Calibri" pitchFamily="34" charset="-120"/>
+              </a:rPr>
+              <a:t>2</a:t>
+            </a:r>
+            <a:endParaRPr lang="en-US" sz="1100" dirty="0"/>
+          </a:p>
+        </p:txBody>
+      </p:sp>
+      <p:sp>
+        <p:nvSpPr>
+          <p:cNvPr id="5" name="Shape 3">
+            <a:extLst>
+              <a:ext uri="{FF2B5EF4-FFF2-40B4-BE49-F238E27FC236}">
+                <a16:creationId xmlns:a16="http://schemas.microsoft.com/office/drawing/2014/main" id="{7C460017-13CE-7F21-68B4-D318F838D76F}"/>
+              </a:ext>
+            </a:extLst>
+          </p:cNvPr>
+          <p:cNvSpPr/>
+          <p:nvPr/>
+        </p:nvSpPr>
+        <p:spPr>
+          <a:xfrm>
+            <a:off x="0" y="5074920"/>
+            <a:ext cx="9144000" cy="68580"/>
+          </a:xfrm>
+          <a:prstGeom prst="rect">
+            <a:avLst/>
+          </a:prstGeom>
+          <a:solidFill>
+            <a:srgbClr val="2E75B6"/>
+          </a:solidFill>
+          <a:ln w="12700">
+            <a:solidFill>
+              <a:srgbClr val="2E75B6"/>
+            </a:solidFill>
+            <a:prstDash val="solid"/>
+          </a:ln>
+        </p:spPr>
+      </p:sp>
+      <p:sp>
+        <p:nvSpPr>
+          <p:cNvPr id="31" name="TextBox 30">
+            <a:extLst>
+              <a:ext uri="{FF2B5EF4-FFF2-40B4-BE49-F238E27FC236}">
+                <a16:creationId xmlns:a16="http://schemas.microsoft.com/office/drawing/2014/main" id="{B19A950A-7ED2-8EE4-7D43-A9A5009FCEE2}"/>
+              </a:ext>
+            </a:extLst>
+          </p:cNvPr>
+          <p:cNvSpPr txBox="1"/>
+          <p:nvPr/>
+        </p:nvSpPr>
+        <p:spPr>
+          <a:xfrm>
+            <a:off x="2553789" y="2198346"/>
+            <a:ext cx="5610497" cy="369332"/>
+          </a:xfrm>
+          <a:prstGeom prst="rect">
+            <a:avLst/>
+          </a:prstGeom>
+          <a:noFill/>
+        </p:spPr>
+        <p:txBody>
+          <a:bodyPr wrap="square" rtlCol="0">
+            <a:spAutoFit/>
+          </a:bodyPr>
+          <a:lstStyle/>
+          <a:p>
+            <a:r>
+              <a:rPr lang="ru-RU" dirty="0"/>
+              <a:t>ТУТ БУДУТ СКРИНШОТЫ ТЕСТОВ</a:t>
+            </a:r>
+          </a:p>
+        </p:txBody>
+      </p:sp>
+    </p:spTree>
+    <p:extLst>
+      <p:ext uri="{BB962C8B-B14F-4D97-AF65-F5344CB8AC3E}">
+        <p14:creationId xmlns:p14="http://schemas.microsoft.com/office/powerpoint/2010/main" val="1147206457"/>
+      </p:ext>
+    </p:extLst>
+  </p:cSld>
+  <p:clrMapOvr>
+    <a:masterClrMapping/>
+  </p:clrMapOvr>
+</p:sld>
+</file>
+
+<file path=ppt/slides/slide13.xml><?xml version="1.0" encoding="utf-8"?>
 <p:sld xmlns:a="http://schemas.openxmlformats.org/drawingml/2006/main" xmlns:r="http://schemas.openxmlformats.org/officeDocument/2006/relationships" xmlns:p="http://schemas.openxmlformats.org/presentationml/2006/main">
   <p:cSld name="Slide 12">
     <p:bg>
@@ -4108,7 +5034,18 @@
                 <a:ea typeface="Calibri" pitchFamily="34" charset="-122"/>
                 <a:cs typeface="Calibri" pitchFamily="34" charset="-120"/>
               </a:rPr>
-              <a:t>12</a:t>
+              <a:t>1</a:t>
+            </a:r>
+            <a:r>
+              <a:rPr lang="ru-RU" sz="1100" dirty="0">
+                <a:solidFill>
+                  <a:srgbClr val="BFBFBF"/>
+                </a:solidFill>
+                <a:latin typeface="Calibri" pitchFamily="34" charset="0"/>
+                <a:ea typeface="Calibri" pitchFamily="34" charset="-122"/>
+                <a:cs typeface="Calibri" pitchFamily="34" charset="-120"/>
+              </a:rPr>
+              <a:t>3</a:t>
             </a:r>
             <a:endParaRPr lang="en-US" sz="1100" dirty="0"/>
           </a:p>
@@ -4601,16 +5538,187 @@
           </a:p>
         </p:txBody>
       </p:sp>
-      <p:sp>
-        <p:nvSpPr>
-          <p:cNvPr id="19" name="Shape 17"/>
-          <p:cNvSpPr/>
-          <p:nvPr/>
-        </p:nvSpPr>
-        <p:spPr>
-          <a:xfrm>
-            <a:off x="320040" y="3483864"/>
-            <a:ext cx="347472" cy="347472"/>
+    </p:spTree>
+  </p:cSld>
+  <p:clrMapOvr>
+    <a:masterClrMapping/>
+  </p:clrMapOvr>
+</p:sld>
+</file>
+
+<file path=ppt/slides/slide14.xml><?xml version="1.0" encoding="utf-8"?>
+<p:sld xmlns:a="http://schemas.openxmlformats.org/drawingml/2006/main" xmlns:r="http://schemas.openxmlformats.org/officeDocument/2006/relationships" xmlns:p="http://schemas.openxmlformats.org/presentationml/2006/main">
+  <p:cSld>
+    <p:bg>
+      <p:bgPr>
+        <a:solidFill>
+          <a:srgbClr val="FFFFFF"/>
+        </a:solidFill>
+        <a:effectLst/>
+      </p:bgPr>
+    </p:bg>
+    <p:spTree>
+      <p:nvGrpSpPr>
+        <p:cNvPr id="1" name="">
+          <a:extLst>
+            <a:ext uri="{FF2B5EF4-FFF2-40B4-BE49-F238E27FC236}">
+              <a16:creationId xmlns:a16="http://schemas.microsoft.com/office/drawing/2014/main" id="{2612FE4E-14E5-2B59-17DE-12DB7328E2FF}"/>
+            </a:ext>
+          </a:extLst>
+        </p:cNvPr>
+        <p:cNvGrpSpPr/>
+        <p:nvPr/>
+      </p:nvGrpSpPr>
+      <p:grpSpPr>
+        <a:xfrm>
+          <a:off x="0" y="0"/>
+          <a:ext cx="0" cy="0"/>
+          <a:chOff x="0" y="0"/>
+          <a:chExt cx="0" cy="0"/>
+        </a:xfrm>
+      </p:grpSpPr>
+      <p:sp>
+        <p:nvSpPr>
+          <p:cNvPr id="4" name="Text 2">
+            <a:extLst>
+              <a:ext uri="{FF2B5EF4-FFF2-40B4-BE49-F238E27FC236}">
+                <a16:creationId xmlns:a16="http://schemas.microsoft.com/office/drawing/2014/main" id="{B8277FAC-4371-879E-F4AF-8AF7026A3B4B}"/>
+              </a:ext>
+            </a:extLst>
+          </p:cNvPr>
+          <p:cNvSpPr/>
+          <p:nvPr/>
+        </p:nvSpPr>
+        <p:spPr>
+          <a:xfrm>
+            <a:off x="8595360" y="4846320"/>
+            <a:ext cx="457200" cy="228600"/>
+          </a:xfrm>
+          <a:prstGeom prst="rect">
+            <a:avLst/>
+          </a:prstGeom>
+          <a:noFill/>
+          <a:ln/>
+        </p:spPr>
+        <p:txBody>
+          <a:bodyPr wrap="square" rtlCol="0" anchor="ctr"/>
+          <a:lstStyle/>
+          <a:p>
+            <a:pPr marL="0" indent="0" algn="r">
+              <a:buNone/>
+            </a:pPr>
+            <a:r>
+              <a:rPr lang="en-US" sz="1100" dirty="0">
+                <a:solidFill>
+                  <a:srgbClr val="BFBFBF"/>
+                </a:solidFill>
+                <a:latin typeface="Calibri" pitchFamily="34" charset="0"/>
+                <a:ea typeface="Calibri" pitchFamily="34" charset="-122"/>
+                <a:cs typeface="Calibri" pitchFamily="34" charset="-120"/>
+              </a:rPr>
+              <a:t>1</a:t>
+            </a:r>
+            <a:r>
+              <a:rPr lang="ru-RU" sz="1100" dirty="0">
+                <a:solidFill>
+                  <a:srgbClr val="BFBFBF"/>
+                </a:solidFill>
+                <a:latin typeface="Calibri" pitchFamily="34" charset="0"/>
+                <a:ea typeface="Calibri" pitchFamily="34" charset="-122"/>
+                <a:cs typeface="Calibri" pitchFamily="34" charset="-120"/>
+              </a:rPr>
+              <a:t>4</a:t>
+            </a:r>
+            <a:endParaRPr lang="en-US" sz="1100" dirty="0"/>
+          </a:p>
+        </p:txBody>
+      </p:sp>
+      <p:sp>
+        <p:nvSpPr>
+          <p:cNvPr id="5" name="Shape 3">
+            <a:extLst>
+              <a:ext uri="{FF2B5EF4-FFF2-40B4-BE49-F238E27FC236}">
+                <a16:creationId xmlns:a16="http://schemas.microsoft.com/office/drawing/2014/main" id="{AB6DF2AB-E392-448D-7D21-3D60D112641D}"/>
+              </a:ext>
+            </a:extLst>
+          </p:cNvPr>
+          <p:cNvSpPr/>
+          <p:nvPr/>
+        </p:nvSpPr>
+        <p:spPr>
+          <a:xfrm>
+            <a:off x="0" y="5074920"/>
+            <a:ext cx="9144000" cy="68580"/>
+          </a:xfrm>
+          <a:prstGeom prst="rect">
+            <a:avLst/>
+          </a:prstGeom>
+          <a:solidFill>
+            <a:srgbClr val="2E75B6"/>
+          </a:solidFill>
+          <a:ln w="12700">
+            <a:solidFill>
+              <a:srgbClr val="2E75B6"/>
+            </a:solidFill>
+            <a:prstDash val="solid"/>
+          </a:ln>
+        </p:spPr>
+      </p:sp>
+      <p:sp>
+        <p:nvSpPr>
+          <p:cNvPr id="26" name="Text 24">
+            <a:extLst>
+              <a:ext uri="{FF2B5EF4-FFF2-40B4-BE49-F238E27FC236}">
+                <a16:creationId xmlns:a16="http://schemas.microsoft.com/office/drawing/2014/main" id="{39963738-3AAB-34B3-F8F7-91A9E535E520}"/>
+              </a:ext>
+            </a:extLst>
+          </p:cNvPr>
+          <p:cNvSpPr/>
+          <p:nvPr/>
+        </p:nvSpPr>
+        <p:spPr>
+          <a:xfrm>
+            <a:off x="2286000" y="4572000"/>
+            <a:ext cx="4572000" cy="411480"/>
+          </a:xfrm>
+          <a:prstGeom prst="rect">
+            <a:avLst/>
+          </a:prstGeom>
+          <a:noFill/>
+          <a:ln/>
+        </p:spPr>
+        <p:txBody>
+          <a:bodyPr wrap="square" lIns="0" tIns="0" rIns="0" bIns="0" rtlCol="0" anchor="ctr"/>
+          <a:lstStyle/>
+          <a:p>
+            <a:pPr marL="0" indent="0" algn="ctr">
+              <a:buNone/>
+            </a:pPr>
+            <a:r>
+              <a:rPr lang="en-US" sz="1300" b="1" dirty="0">
+                <a:solidFill>
+                  <a:srgbClr val="FFFFFF"/>
+                </a:solidFill>
+                <a:latin typeface="Calibri" pitchFamily="34" charset="0"/>
+                <a:ea typeface="Calibri" pitchFamily="34" charset="-122"/>
+                <a:cs typeface="Calibri" pitchFamily="34" charset="-120"/>
+              </a:rPr>
+              <a:t>Спасибо за внимание! Готов ответить на вопросы.</a:t>
+            </a:r>
+            <a:endParaRPr lang="en-US" sz="1300" dirty="0"/>
+          </a:p>
+        </p:txBody>
+      </p:sp>
+      <p:sp>
+        <p:nvSpPr>
+          <p:cNvPr id="25" name="Shape 23"/>
+          <p:cNvSpPr/>
+          <p:nvPr/>
+        </p:nvSpPr>
+        <p:spPr>
+          <a:xfrm>
+            <a:off x="590006" y="909501"/>
+            <a:ext cx="7963988" cy="2378529"/>
           </a:xfrm>
           <a:prstGeom prst="rect">
             <a:avLst/>
@@ -4628,14 +5736,14 @@
       </p:sp>
       <p:sp>
         <p:nvSpPr>
-          <p:cNvPr id="20" name="Text 18"/>
-          <p:cNvSpPr/>
-          <p:nvPr/>
-        </p:nvSpPr>
-        <p:spPr>
-          <a:xfrm>
-            <a:off x="320040" y="3483864"/>
-            <a:ext cx="347472" cy="347472"/>
+          <p:cNvPr id="22" name="Text 24"/>
+          <p:cNvSpPr/>
+          <p:nvPr/>
+        </p:nvSpPr>
+        <p:spPr>
+          <a:xfrm>
+            <a:off x="590006" y="1893026"/>
+            <a:ext cx="7963988" cy="411480"/>
           </a:xfrm>
           <a:prstGeom prst="rect">
             <a:avLst/>
@@ -4651,7 +5759,7 @@
               <a:buNone/>
             </a:pPr>
             <a:r>
-              <a:rPr lang="en-US" sz="1300" b="1" dirty="0">
+              <a:rPr lang="en-US" sz="3600" b="1" dirty="0">
                 <a:solidFill>
                   <a:srgbClr val="FFFFFF"/>
                 </a:solidFill>
@@ -4659,116 +5767,18 @@
                 <a:ea typeface="Calibri" pitchFamily="34" charset="-122"/>
                 <a:cs typeface="Calibri" pitchFamily="34" charset="-120"/>
               </a:rPr>
-              <a:t>5</a:t>
-            </a:r>
-            <a:endParaRPr lang="en-US" sz="1300" dirty="0"/>
-          </a:p>
-        </p:txBody>
-      </p:sp>
-      <p:sp>
-        <p:nvSpPr>
-          <p:cNvPr id="21" name="Text 19"/>
-          <p:cNvSpPr/>
-          <p:nvPr/>
-        </p:nvSpPr>
-        <p:spPr>
-          <a:xfrm>
-            <a:off x="777240" y="3429000"/>
-            <a:ext cx="8046720" cy="502920"/>
-          </a:xfrm>
-          <a:prstGeom prst="rect">
-            <a:avLst/>
-          </a:prstGeom>
-          <a:noFill/>
-          <a:ln/>
-        </p:spPr>
-        <p:txBody>
-          <a:bodyPr wrap="square" rtlCol="0" anchor="ctr"/>
-          <a:lstStyle/>
-          <a:p>
-            <a:pPr marL="0" indent="0">
-              <a:buNone/>
-            </a:pPr>
-            <a:r>
-              <a:rPr lang="en-US" sz="1250" dirty="0">
-                <a:solidFill>
-                  <a:srgbClr val="1A1A1A"/>
-                </a:solidFill>
-                <a:latin typeface="Calibri" pitchFamily="34" charset="0"/>
-                <a:ea typeface="Calibri" pitchFamily="34" charset="-122"/>
-                <a:cs typeface="Calibri" pitchFamily="34" charset="-120"/>
-              </a:rPr>
-              <a:t>Разработан REST API для управления расписанием и аудиторным фондом</a:t>
-            </a:r>
-            <a:endParaRPr lang="en-US" sz="1250" dirty="0"/>
-          </a:p>
-        </p:txBody>
-      </p:sp>
-      <p:sp>
-        <p:nvSpPr>
-          <p:cNvPr id="25" name="Shape 23"/>
-          <p:cNvSpPr/>
-          <p:nvPr/>
-        </p:nvSpPr>
-        <p:spPr>
-          <a:xfrm>
-            <a:off x="2286000" y="4572000"/>
-            <a:ext cx="4572000" cy="411480"/>
-          </a:xfrm>
-          <a:prstGeom prst="rect">
-            <a:avLst/>
-          </a:prstGeom>
-          <a:solidFill>
-            <a:srgbClr val="1F3864"/>
-          </a:solidFill>
-          <a:ln w="12700">
-            <a:solidFill>
-              <a:srgbClr val="1F3864"/>
-            </a:solidFill>
-            <a:prstDash val="solid"/>
-          </a:ln>
-        </p:spPr>
-      </p:sp>
-      <p:sp>
-        <p:nvSpPr>
-          <p:cNvPr id="26" name="Text 24"/>
-          <p:cNvSpPr/>
-          <p:nvPr/>
-        </p:nvSpPr>
-        <p:spPr>
-          <a:xfrm>
-            <a:off x="2286000" y="4572000"/>
-            <a:ext cx="4572000" cy="411480"/>
-          </a:xfrm>
-          <a:prstGeom prst="rect">
-            <a:avLst/>
-          </a:prstGeom>
-          <a:noFill/>
-          <a:ln/>
-        </p:spPr>
-        <p:txBody>
-          <a:bodyPr wrap="square" lIns="0" tIns="0" rIns="0" bIns="0" rtlCol="0" anchor="ctr"/>
-          <a:lstStyle/>
-          <a:p>
-            <a:pPr marL="0" indent="0" algn="ctr">
-              <a:buNone/>
-            </a:pPr>
-            <a:r>
-              <a:rPr lang="en-US" sz="1300" b="1" dirty="0">
-                <a:solidFill>
-                  <a:srgbClr val="FFFFFF"/>
-                </a:solidFill>
-                <a:latin typeface="Calibri" pitchFamily="34" charset="0"/>
-                <a:ea typeface="Calibri" pitchFamily="34" charset="-122"/>
-                <a:cs typeface="Calibri" pitchFamily="34" charset="-120"/>
-              </a:rPr>
               <a:t>Спасибо за внимание! Готов ответить на вопросы.</a:t>
             </a:r>
-            <a:endParaRPr lang="en-US" sz="1300" dirty="0"/>
+            <a:endParaRPr lang="en-US" sz="3600" dirty="0"/>
           </a:p>
         </p:txBody>
       </p:sp>
     </p:spTree>
+    <p:extLst>
+      <p:ext uri="{BB962C8B-B14F-4D97-AF65-F5344CB8AC3E}">
+        <p14:creationId xmlns:p14="http://schemas.microsoft.com/office/powerpoint/2010/main" val="1835806306"/>
+      </p:ext>
+    </p:extLst>
   </p:cSld>
   <p:clrMapOvr>
     <a:masterClrMapping/>
@@ -4890,7 +5900,7 @@
               <a:buNone/>
             </a:pPr>
             <a:r>
-              <a:rPr lang="en-US" sz="1100" dirty="0">
+              <a:rPr lang="ru-RU" sz="1100" dirty="0">
                 <a:solidFill>
                   <a:srgbClr val="BFBFBF"/>
                 </a:solidFill>
@@ -4954,7 +5964,7 @@
               <a:buNone/>
             </a:pPr>
             <a:r>
-              <a:rPr lang="en-US" b="1" dirty="0">
+              <a:rPr lang="en-US" sz="2000" b="1" dirty="0">
                 <a:solidFill>
                   <a:srgbClr val="1F3864"/>
                 </a:solidFill>
@@ -4964,7 +5974,7 @@
               </a:rPr>
               <a:t>Составление учебного расписания — одна из ключевых административных задач университета.</a:t>
             </a:r>
-            <a:endParaRPr lang="en-US" dirty="0"/>
+            <a:endParaRPr lang="en-US" sz="2000" dirty="0"/>
           </a:p>
         </p:txBody>
       </p:sp>
@@ -4976,7 +5986,7 @@
         </p:nvSpPr>
         <p:spPr>
           <a:xfrm>
-            <a:off x="365760" y="1691640"/>
+            <a:off x="304800" y="1600200"/>
             <a:ext cx="8290560" cy="3383280"/>
           </a:xfrm>
           <a:prstGeom prst="rect">
@@ -4997,7 +6007,7 @@
               <a:buChar char="•"/>
             </a:pPr>
             <a:r>
-              <a:rPr lang="ru-RU" sz="1600" dirty="0">
+              <a:rPr lang="ru-RU" sz="2000" dirty="0">
                 <a:solidFill>
                   <a:srgbClr val="1A1A1A"/>
                 </a:solidFill>
@@ -5017,7 +6027,7 @@
               <a:buChar char="•"/>
             </a:pPr>
             <a:r>
-              <a:rPr lang="ru-RU" sz="1600" dirty="0">
+              <a:rPr lang="ru-RU" sz="2000" dirty="0">
                 <a:solidFill>
                   <a:srgbClr val="1A1A1A"/>
                 </a:solidFill>
@@ -5028,7 +6038,7 @@
               <a:t>В </a:t>
             </a:r>
             <a:r>
-              <a:rPr lang="ru-RU" sz="1600" dirty="0" err="1">
+              <a:rPr lang="ru-RU" sz="2000" dirty="0" err="1">
                 <a:solidFill>
                   <a:srgbClr val="1A1A1A"/>
                 </a:solidFill>
@@ -5039,7 +6049,7 @@
               <a:t>АлтГУ</a:t>
             </a:r>
             <a:r>
-              <a:rPr lang="ru-RU" sz="1600" dirty="0">
+              <a:rPr lang="ru-RU" sz="2000" dirty="0">
                 <a:solidFill>
                   <a:srgbClr val="1A1A1A"/>
                 </a:solidFill>
@@ -5059,7 +6069,7 @@
               <a:buChar char="•"/>
             </a:pPr>
             <a:r>
-              <a:rPr lang="ru-RU" sz="1600" dirty="0">
+              <a:rPr lang="ru-RU" sz="2000" dirty="0">
                 <a:solidFill>
                   <a:srgbClr val="1A1A1A"/>
                 </a:solidFill>
@@ -5069,7 +6079,7 @@
               </a:rPr>
               <a:t>Существующий подход не отвечает современным требованиям к скорости, качеству и прозрачности планирования.</a:t>
             </a:r>
-            <a:endParaRPr lang="en-US" sz="1600" dirty="0"/>
+            <a:endParaRPr lang="en-US" sz="2000" dirty="0"/>
           </a:p>
         </p:txBody>
       </p:sp>
@@ -5195,7 +6205,7 @@
               <a:buNone/>
             </a:pPr>
             <a:r>
-              <a:rPr lang="en-US" sz="1100" dirty="0">
+              <a:rPr lang="ru-RU" sz="1100" dirty="0">
                 <a:solidFill>
                   <a:srgbClr val="BFBFBF"/>
                 </a:solidFill>
@@ -5203,7 +6213,7 @@
                 <a:ea typeface="Calibri" pitchFamily="34" charset="-122"/>
                 <a:cs typeface="Calibri" pitchFamily="34" charset="-120"/>
               </a:rPr>
-              <a:t>5</a:t>
+              <a:t>3</a:t>
             </a:r>
             <a:endParaRPr lang="en-US" sz="1100" dirty="0"/>
           </a:p>
@@ -5259,7 +6269,7 @@
               <a:buNone/>
             </a:pPr>
             <a:r>
-              <a:rPr lang="en-US" sz="1300" b="1" dirty="0">
+              <a:rPr lang="en-US" b="1" dirty="0">
                 <a:solidFill>
                   <a:srgbClr val="1F3864"/>
                 </a:solidFill>
@@ -5269,7 +6279,7 @@
               </a:rPr>
               <a:t>Цель:</a:t>
             </a:r>
-            <a:endParaRPr lang="en-US" sz="1300" dirty="0"/>
+            <a:endParaRPr lang="en-US" dirty="0"/>
           </a:p>
         </p:txBody>
       </p:sp>
@@ -5298,7 +6308,7 @@
               <a:buNone/>
             </a:pPr>
             <a:r>
-              <a:rPr lang="ru-RU" sz="1250" dirty="0">
+              <a:rPr lang="ru-RU" dirty="0">
                 <a:solidFill>
                   <a:srgbClr val="1A1A1A"/>
                 </a:solidFill>
@@ -5308,7 +6318,7 @@
               </a:rPr>
               <a:t>проектирование серверной части системы, разработка структур данных и алгоритмического обеспечения для генерации расписания.</a:t>
             </a:r>
-            <a:endParaRPr lang="en-US" sz="1250" dirty="0"/>
+            <a:endParaRPr lang="en-US" dirty="0"/>
           </a:p>
         </p:txBody>
       </p:sp>
@@ -5362,7 +6372,7 @@
               <a:buNone/>
             </a:pPr>
             <a:r>
-              <a:rPr lang="en-US" sz="1400" b="1" dirty="0">
+              <a:rPr lang="en-US" b="1" dirty="0">
                 <a:solidFill>
                   <a:srgbClr val="FFFFFF"/>
                 </a:solidFill>
@@ -5372,7 +6382,7 @@
               </a:rPr>
               <a:t>1</a:t>
             </a:r>
-            <a:endParaRPr lang="en-US" sz="1400" dirty="0"/>
+            <a:endParaRPr lang="en-US" dirty="0"/>
           </a:p>
         </p:txBody>
       </p:sp>
@@ -5401,7 +6411,7 @@
               <a:buNone/>
             </a:pPr>
             <a:r>
-              <a:rPr lang="ru-RU" sz="1250" dirty="0">
+              <a:rPr lang="ru-RU" dirty="0">
                 <a:solidFill>
                   <a:srgbClr val="1A1A1A"/>
                 </a:solidFill>
@@ -5411,7 +6421,7 @@
               </a:rPr>
               <a:t>Формализация предметной области и математическая постановка задачи.</a:t>
             </a:r>
-            <a:endParaRPr lang="en-US" sz="1250" dirty="0"/>
+            <a:endParaRPr lang="en-US" dirty="0"/>
           </a:p>
         </p:txBody>
       </p:sp>
@@ -5465,7 +6475,7 @@
               <a:buNone/>
             </a:pPr>
             <a:r>
-              <a:rPr lang="en-US" sz="1400" b="1" dirty="0">
+              <a:rPr lang="en-US" b="1" dirty="0">
                 <a:solidFill>
                   <a:srgbClr val="FFFFFF"/>
                 </a:solidFill>
@@ -5475,7 +6485,7 @@
               </a:rPr>
               <a:t>2</a:t>
             </a:r>
-            <a:endParaRPr lang="en-US" sz="1400" dirty="0"/>
+            <a:endParaRPr lang="en-US" dirty="0"/>
           </a:p>
         </p:txBody>
       </p:sp>
@@ -5504,7 +6514,7 @@
               <a:buNone/>
             </a:pPr>
             <a:r>
-              <a:rPr lang="ru-RU" sz="1250" dirty="0">
+              <a:rPr lang="ru-RU" dirty="0">
                 <a:solidFill>
                   <a:srgbClr val="1A1A1A"/>
                 </a:solidFill>
@@ -5515,7 +6525,7 @@
               <a:t>Проектирование нормализованной реляционной БД (</a:t>
             </a:r>
             <a:r>
-              <a:rPr lang="ru-RU" sz="1250" dirty="0" err="1">
+              <a:rPr lang="ru-RU" dirty="0" err="1">
                 <a:solidFill>
                   <a:srgbClr val="1A1A1A"/>
                 </a:solidFill>
@@ -5526,7 +6536,7 @@
               <a:t>PostgreSQL</a:t>
             </a:r>
             <a:r>
-              <a:rPr lang="ru-RU" sz="1250" dirty="0">
+              <a:rPr lang="ru-RU" dirty="0">
                 <a:solidFill>
                   <a:srgbClr val="1A1A1A"/>
                 </a:solidFill>
@@ -5536,7 +6546,7 @@
               </a:rPr>
               <a:t>).</a:t>
             </a:r>
-            <a:endParaRPr lang="en-US" sz="1250" dirty="0"/>
+            <a:endParaRPr lang="en-US" dirty="0"/>
           </a:p>
         </p:txBody>
       </p:sp>
@@ -5590,7 +6600,7 @@
               <a:buNone/>
             </a:pPr>
             <a:r>
-              <a:rPr lang="en-US" sz="1400" b="1" dirty="0">
+              <a:rPr lang="en-US" b="1" dirty="0">
                 <a:solidFill>
                   <a:srgbClr val="FFFFFF"/>
                 </a:solidFill>
@@ -5600,7 +6610,7 @@
               </a:rPr>
               <a:t>3</a:t>
             </a:r>
-            <a:endParaRPr lang="en-US" sz="1400" dirty="0"/>
+            <a:endParaRPr lang="en-US" dirty="0"/>
           </a:p>
         </p:txBody>
       </p:sp>
@@ -5629,7 +6639,7 @@
               <a:buNone/>
             </a:pPr>
             <a:r>
-              <a:rPr lang="ru-RU" sz="1250" dirty="0">
+              <a:rPr lang="ru-RU" dirty="0">
                 <a:solidFill>
                   <a:srgbClr val="1A1A1A"/>
                 </a:solidFill>
@@ -5639,7 +6649,7 @@
               </a:rPr>
               <a:t>Реализация алгоритма оптимизации на базе программирования в ограничениях.</a:t>
             </a:r>
-            <a:endParaRPr lang="en-US" sz="1250" dirty="0"/>
+            <a:endParaRPr lang="en-US" dirty="0"/>
           </a:p>
         </p:txBody>
       </p:sp>
@@ -5765,7 +6775,7 @@
               <a:buNone/>
             </a:pPr>
             <a:r>
-              <a:rPr lang="en-US" sz="1100" dirty="0">
+              <a:rPr lang="ru-RU" sz="1100" dirty="0">
                 <a:solidFill>
                   <a:srgbClr val="BFBFBF"/>
                 </a:solidFill>
@@ -5773,7 +6783,7 @@
                 <a:ea typeface="Calibri" pitchFamily="34" charset="-122"/>
                 <a:cs typeface="Calibri" pitchFamily="34" charset="-120"/>
               </a:rPr>
-              <a:t>3</a:t>
+              <a:t>4</a:t>
             </a:r>
             <a:endParaRPr lang="en-US" sz="1100" dirty="0"/>
           </a:p>
@@ -6477,7 +7487,7 @@
               <a:buNone/>
             </a:pPr>
             <a:r>
-              <a:rPr lang="en-US" sz="1100" dirty="0">
+              <a:rPr lang="ru-RU" sz="1100" dirty="0">
                 <a:solidFill>
                   <a:srgbClr val="BFBFBF"/>
                 </a:solidFill>
@@ -6485,7 +7495,7 @@
                 <a:ea typeface="Calibri" pitchFamily="34" charset="-122"/>
                 <a:cs typeface="Calibri" pitchFamily="34" charset="-120"/>
               </a:rPr>
-              <a:t>4</a:t>
+              <a:t>5</a:t>
             </a:r>
             <a:endParaRPr lang="en-US" sz="1100" dirty="0"/>
           </a:p>
@@ -8147,7 +9157,7 @@
               <a:buNone/>
             </a:pPr>
             <a:r>
-              <a:rPr lang="en-US" sz="1100" dirty="0">
+              <a:rPr lang="ru-RU" sz="1100" dirty="0">
                 <a:solidFill>
                   <a:srgbClr val="BFBFBF"/>
                 </a:solidFill>
@@ -8155,7 +9165,7 @@
                 <a:ea typeface="Calibri" pitchFamily="34" charset="-122"/>
                 <a:cs typeface="Calibri" pitchFamily="34" charset="-120"/>
               </a:rPr>
-              <a:t>9</a:t>
+              <a:t>6</a:t>
             </a:r>
             <a:endParaRPr lang="en-US" sz="1100" dirty="0"/>
           </a:p>
@@ -8502,7 +9512,29 @@
                 <a:ea typeface="Calibri" pitchFamily="34" charset="-122"/>
                 <a:cs typeface="Calibri" pitchFamily="34" charset="-120"/>
               </a:rPr>
-              <a:t>Мягкие ограничения (3)</a:t>
+              <a:t>Мягкие </a:t>
+            </a:r>
+            <a:r>
+              <a:rPr lang="en-US" sz="1300" b="1" dirty="0" err="1">
+                <a:solidFill>
+                  <a:srgbClr val="FFFFFF"/>
+                </a:solidFill>
+                <a:latin typeface="Calibri" pitchFamily="34" charset="0"/>
+                <a:ea typeface="Calibri" pitchFamily="34" charset="-122"/>
+                <a:cs typeface="Calibri" pitchFamily="34" charset="-120"/>
+              </a:rPr>
+              <a:t>ограничения</a:t>
+            </a:r>
+            <a:r>
+              <a:rPr lang="en-US" sz="1300" b="1" dirty="0">
+                <a:solidFill>
+                  <a:srgbClr val="FFFFFF"/>
+                </a:solidFill>
+                <a:latin typeface="Calibri" pitchFamily="34" charset="0"/>
+                <a:ea typeface="Calibri" pitchFamily="34" charset="-122"/>
+                <a:cs typeface="Calibri" pitchFamily="34" charset="-120"/>
+              </a:rPr>
+              <a:t> (2)</a:t>
             </a:r>
             <a:endParaRPr lang="en-US" sz="1300" dirty="0"/>
           </a:p>
@@ -8516,8 +9548,8 @@
         </p:nvSpPr>
         <p:spPr>
           <a:xfrm>
-            <a:off x="4754880" y="1234440"/>
-            <a:ext cx="4069080" cy="1097280"/>
+            <a:off x="4754880" y="1234439"/>
+            <a:ext cx="4069080" cy="1676835"/>
           </a:xfrm>
           <a:prstGeom prst="rect">
             <a:avLst/>
@@ -8542,7 +9574,7 @@
         <p:spPr>
           <a:xfrm>
             <a:off x="4892040" y="1298448"/>
-            <a:ext cx="3840480" cy="347472"/>
+            <a:ext cx="3840480" cy="530998"/>
           </a:xfrm>
           <a:prstGeom prst="rect">
             <a:avLst/>
@@ -8581,7 +9613,7 @@
         <p:spPr>
           <a:xfrm>
             <a:off x="4892040" y="1673352"/>
-            <a:ext cx="3840480" cy="594360"/>
+            <a:ext cx="3840480" cy="908286"/>
           </a:xfrm>
           <a:prstGeom prst="rect">
             <a:avLst/>
@@ -8619,8 +9651,8 @@
         </p:nvSpPr>
         <p:spPr>
           <a:xfrm>
-            <a:off x="4754880" y="2423160"/>
-            <a:ext cx="4069080" cy="1097280"/>
+            <a:off x="4754880" y="3136392"/>
+            <a:ext cx="4069080" cy="1737360"/>
           </a:xfrm>
           <a:prstGeom prst="rect">
             <a:avLst/>
@@ -8644,8 +9676,8 @@
         </p:nvSpPr>
         <p:spPr>
           <a:xfrm>
-            <a:off x="4892040" y="2487168"/>
-            <a:ext cx="3840480" cy="347472"/>
+            <a:off x="4869180" y="3289337"/>
+            <a:ext cx="3840480" cy="550164"/>
           </a:xfrm>
           <a:prstGeom prst="rect">
             <a:avLst/>
@@ -8683,8 +9715,8 @@
         </p:nvSpPr>
         <p:spPr>
           <a:xfrm>
-            <a:off x="4892040" y="2862072"/>
-            <a:ext cx="3840480" cy="594360"/>
+            <a:off x="4869180" y="3662607"/>
+            <a:ext cx="3840480" cy="941070"/>
           </a:xfrm>
           <a:prstGeom prst="rect">
             <a:avLst/>
@@ -8708,100 +9740,19 @@
                 <a:ea typeface="Calibri" pitchFamily="34" charset="-122"/>
                 <a:cs typeface="Calibri" pitchFamily="34" charset="-120"/>
               </a:rPr>
-              <a:t>Лабораторные работы ставятся двумя парами подряд в один день</a:t>
-            </a:r>
-            <a:endParaRPr lang="en-US" sz="1150" dirty="0"/>
-          </a:p>
-        </p:txBody>
-      </p:sp>
-      <p:sp>
-        <p:nvSpPr>
-          <p:cNvPr id="18" name="Shape 16"/>
-          <p:cNvSpPr/>
-          <p:nvPr/>
-        </p:nvSpPr>
-        <p:spPr>
-          <a:xfrm>
-            <a:off x="4754880" y="3611880"/>
-            <a:ext cx="4069080" cy="1097280"/>
-          </a:xfrm>
-          <a:prstGeom prst="rect">
-            <a:avLst/>
-          </a:prstGeom>
-          <a:solidFill>
-            <a:srgbClr val="F4F4F4"/>
-          </a:solidFill>
-          <a:ln w="12700">
-            <a:solidFill>
-              <a:srgbClr val="D0D8E8"/>
-            </a:solidFill>
-            <a:prstDash val="solid"/>
-          </a:ln>
-        </p:spPr>
-      </p:sp>
-      <p:sp>
-        <p:nvSpPr>
-          <p:cNvPr id="19" name="Text 17"/>
-          <p:cNvSpPr/>
-          <p:nvPr/>
-        </p:nvSpPr>
-        <p:spPr>
-          <a:xfrm>
-            <a:off x="4892040" y="3675888"/>
-            <a:ext cx="3840480" cy="347472"/>
-          </a:xfrm>
-          <a:prstGeom prst="rect">
-            <a:avLst/>
-          </a:prstGeom>
-          <a:noFill/>
-          <a:ln/>
-        </p:spPr>
-        <p:txBody>
-          <a:bodyPr wrap="square" rtlCol="0" anchor="ctr"/>
-          <a:lstStyle/>
-          <a:p>
-            <a:pPr marL="0" indent="0">
-              <a:buNone/>
-            </a:pPr>
-            <a:r>
-              <a:rPr lang="en-US" sz="1250" b="1" dirty="0">
-                <a:solidFill>
-                  <a:srgbClr val="1F3864"/>
-                </a:solidFill>
-                <a:latin typeface="Calibri" pitchFamily="34" charset="0"/>
-                <a:ea typeface="Calibri" pitchFamily="34" charset="-122"/>
-                <a:cs typeface="Calibri" pitchFamily="34" charset="-120"/>
-              </a:rPr>
-              <a:t>Предпочтительный корпус</a:t>
-            </a:r>
-            <a:endParaRPr lang="en-US" sz="1250" dirty="0"/>
-          </a:p>
-        </p:txBody>
-      </p:sp>
-      <p:sp>
-        <p:nvSpPr>
-          <p:cNvPr id="20" name="Text 18"/>
-          <p:cNvSpPr/>
-          <p:nvPr/>
-        </p:nvSpPr>
-        <p:spPr>
-          <a:xfrm>
-            <a:off x="4892040" y="4050792"/>
-            <a:ext cx="3840480" cy="594360"/>
-          </a:xfrm>
-          <a:prstGeom prst="rect">
-            <a:avLst/>
-          </a:prstGeom>
-          <a:noFill/>
-          <a:ln/>
-        </p:spPr>
-        <p:txBody>
-          <a:bodyPr wrap="square" rtlCol="0" anchor="ctr"/>
-          <a:lstStyle/>
-          <a:p>
-            <a:pPr marL="0" indent="0">
-              <a:buNone/>
-            </a:pPr>
+              <a:t>Лабораторные работы ставятся </a:t>
+            </a:r>
+            <a:r>
+              <a:rPr lang="en-US" sz="1150" dirty="0" err="1">
+                <a:solidFill>
+                  <a:srgbClr val="1A1A1A"/>
+                </a:solidFill>
+                <a:latin typeface="Calibri" pitchFamily="34" charset="0"/>
+                <a:ea typeface="Calibri" pitchFamily="34" charset="-122"/>
+                <a:cs typeface="Calibri" pitchFamily="34" charset="-120"/>
+              </a:rPr>
+              <a:t>двумя</a:t>
+            </a:r>
             <a:r>
               <a:rPr lang="en-US" sz="1150" dirty="0">
                 <a:solidFill>
@@ -8811,7 +9762,29 @@
                 <a:ea typeface="Calibri" pitchFamily="34" charset="-122"/>
                 <a:cs typeface="Calibri" pitchFamily="34" charset="-120"/>
               </a:rPr>
-              <a:t>Занятие размещается в аудитории корпуса кафедры; другие — штрафуются</a:t>
+              <a:t> </a:t>
+            </a:r>
+            <a:r>
+              <a:rPr lang="ru-RU" sz="1150" dirty="0">
+                <a:solidFill>
+                  <a:srgbClr val="1A1A1A"/>
+                </a:solidFill>
+                <a:latin typeface="Calibri" pitchFamily="34" charset="0"/>
+                <a:ea typeface="Calibri" pitchFamily="34" charset="-122"/>
+                <a:cs typeface="Calibri" pitchFamily="34" charset="-120"/>
+              </a:rPr>
+              <a:t>занятиями</a:t>
+            </a:r>
+            <a:r>
+              <a:rPr lang="en-US" sz="1150" dirty="0">
+                <a:solidFill>
+                  <a:srgbClr val="1A1A1A"/>
+                </a:solidFill>
+                <a:latin typeface="Calibri" pitchFamily="34" charset="0"/>
+                <a:ea typeface="Calibri" pitchFamily="34" charset="-122"/>
+                <a:cs typeface="Calibri" pitchFamily="34" charset="-120"/>
+              </a:rPr>
+              <a:t> подряд в один день</a:t>
             </a:r>
             <a:endParaRPr lang="en-US" sz="1150" dirty="0"/>
           </a:p>
@@ -8939,7 +9912,7 @@
               <a:buNone/>
             </a:pPr>
             <a:r>
-              <a:rPr lang="en-US" sz="1100" dirty="0">
+              <a:rPr lang="ru-RU" sz="1100" dirty="0">
                 <a:solidFill>
                   <a:srgbClr val="BFBFBF"/>
                 </a:solidFill>
@@ -8947,7 +9920,7 @@
                 <a:ea typeface="Calibri" pitchFamily="34" charset="-122"/>
                 <a:cs typeface="Calibri" pitchFamily="34" charset="-120"/>
               </a:rPr>
-              <a:t>6</a:t>
+              <a:t>7</a:t>
             </a:r>
             <a:endParaRPr lang="en-US" sz="1100" dirty="0"/>
           </a:p>
@@ -8986,8 +9959,8 @@
         </p:nvSpPr>
         <p:spPr>
           <a:xfrm>
-            <a:off x="850040" y="946404"/>
-            <a:ext cx="2743200" cy="1645920"/>
+            <a:off x="329945" y="1199672"/>
+            <a:ext cx="2370909" cy="1100546"/>
           </a:xfrm>
           <a:prstGeom prst="rect">
             <a:avLst/>
@@ -9011,8 +9984,8 @@
         </p:nvSpPr>
         <p:spPr>
           <a:xfrm>
-            <a:off x="850040" y="946404"/>
-            <a:ext cx="64008" cy="1645920"/>
+            <a:off x="329944" y="1199672"/>
+            <a:ext cx="55321" cy="1100546"/>
           </a:xfrm>
           <a:prstGeom prst="rect">
             <a:avLst/>
@@ -9036,8 +10009,8 @@
         </p:nvSpPr>
         <p:spPr>
           <a:xfrm>
-            <a:off x="1014632" y="1175004"/>
-            <a:ext cx="2560320" cy="640080"/>
+            <a:off x="494537" y="1288572"/>
+            <a:ext cx="2212848" cy="427990"/>
           </a:xfrm>
           <a:prstGeom prst="rect">
             <a:avLst/>
@@ -9075,8 +10048,8 @@
         </p:nvSpPr>
         <p:spPr>
           <a:xfrm>
-            <a:off x="1014632" y="1906524"/>
-            <a:ext cx="2560320" cy="502920"/>
+            <a:off x="494537" y="2001042"/>
+            <a:ext cx="2212848" cy="336278"/>
           </a:xfrm>
           <a:prstGeom prst="rect">
             <a:avLst/>
@@ -9114,8 +10087,8 @@
         </p:nvSpPr>
         <p:spPr>
           <a:xfrm>
-            <a:off x="5015132" y="925830"/>
-            <a:ext cx="2743200" cy="1645920"/>
+            <a:off x="4744459" y="1203836"/>
+            <a:ext cx="2363912" cy="1096382"/>
           </a:xfrm>
           <a:prstGeom prst="rect">
             <a:avLst/>
@@ -9139,8 +10112,8 @@
         </p:nvSpPr>
         <p:spPr>
           <a:xfrm>
-            <a:off x="5015132" y="925830"/>
-            <a:ext cx="64008" cy="1645920"/>
+            <a:off x="4744460" y="1208408"/>
+            <a:ext cx="55158" cy="1096382"/>
           </a:xfrm>
           <a:prstGeom prst="rect">
             <a:avLst/>
@@ -9164,8 +10137,8 @@
         </p:nvSpPr>
         <p:spPr>
           <a:xfrm>
-            <a:off x="5179724" y="1154430"/>
-            <a:ext cx="2560320" cy="640080"/>
+            <a:off x="4909051" y="1325656"/>
+            <a:ext cx="2206318" cy="426371"/>
           </a:xfrm>
           <a:prstGeom prst="rect">
             <a:avLst/>
@@ -9203,8 +10176,8 @@
         </p:nvSpPr>
         <p:spPr>
           <a:xfrm>
-            <a:off x="5179724" y="1885950"/>
-            <a:ext cx="2560320" cy="502920"/>
+            <a:off x="4902053" y="1876364"/>
+            <a:ext cx="2206318" cy="335006"/>
           </a:xfrm>
           <a:prstGeom prst="rect">
             <a:avLst/>
@@ -9242,8 +10215,8 @@
         </p:nvSpPr>
         <p:spPr>
           <a:xfrm>
-            <a:off x="5015132" y="2880360"/>
-            <a:ext cx="2743200" cy="1645920"/>
+            <a:off x="4744460" y="2926766"/>
+            <a:ext cx="2377440" cy="1100546"/>
           </a:xfrm>
           <a:prstGeom prst="rect">
             <a:avLst/>
@@ -9267,8 +10240,8 @@
         </p:nvSpPr>
         <p:spPr>
           <a:xfrm>
-            <a:off x="5015132" y="2880360"/>
-            <a:ext cx="64008" cy="1645920"/>
+            <a:off x="4744460" y="2926766"/>
+            <a:ext cx="55474" cy="1100546"/>
           </a:xfrm>
           <a:prstGeom prst="rect">
             <a:avLst/>
@@ -9292,8 +10265,8 @@
         </p:nvSpPr>
         <p:spPr>
           <a:xfrm>
-            <a:off x="5179724" y="3108960"/>
-            <a:ext cx="2560320" cy="640080"/>
+            <a:off x="4909052" y="3053269"/>
+            <a:ext cx="2218944" cy="427990"/>
           </a:xfrm>
           <a:prstGeom prst="rect">
             <a:avLst/>
@@ -9331,8 +10304,8 @@
         </p:nvSpPr>
         <p:spPr>
           <a:xfrm>
-            <a:off x="5179724" y="3840480"/>
-            <a:ext cx="2560320" cy="502920"/>
+            <a:off x="4915583" y="3605779"/>
+            <a:ext cx="2218944" cy="336278"/>
           </a:xfrm>
           <a:prstGeom prst="rect">
             <a:avLst/>
@@ -9370,8 +10343,8 @@
         </p:nvSpPr>
         <p:spPr>
           <a:xfrm>
-            <a:off x="850040" y="2880360"/>
-            <a:ext cx="2743200" cy="1645920"/>
+            <a:off x="329946" y="2921323"/>
+            <a:ext cx="2383971" cy="1105989"/>
           </a:xfrm>
           <a:prstGeom prst="rect">
             <a:avLst/>
@@ -9395,8 +10368,8 @@
         </p:nvSpPr>
         <p:spPr>
           <a:xfrm>
-            <a:off x="850040" y="2880360"/>
-            <a:ext cx="64008" cy="1645920"/>
+            <a:off x="329946" y="2921323"/>
+            <a:ext cx="55626" cy="1105989"/>
           </a:xfrm>
           <a:prstGeom prst="rect">
             <a:avLst/>
@@ -9420,8 +10393,8 @@
         </p:nvSpPr>
         <p:spPr>
           <a:xfrm>
-            <a:off x="1014632" y="3108960"/>
-            <a:ext cx="2560320" cy="640080"/>
+            <a:off x="494538" y="3010223"/>
+            <a:ext cx="2225039" cy="430107"/>
           </a:xfrm>
           <a:prstGeom prst="rect">
             <a:avLst/>
@@ -9459,8 +10432,8 @@
         </p:nvSpPr>
         <p:spPr>
           <a:xfrm>
-            <a:off x="1014632" y="3840480"/>
-            <a:ext cx="2560320" cy="502920"/>
+            <a:off x="494538" y="3722693"/>
+            <a:ext cx="2225039" cy="337941"/>
           </a:xfrm>
           <a:prstGeom prst="rect">
             <a:avLst/>
@@ -9490,6 +10463,177 @@
           </a:p>
         </p:txBody>
       </p:sp>
+      <p:pic>
+        <p:nvPicPr>
+          <p:cNvPr id="19" name="Рисунок 18">
+            <a:extLst>
+              <a:ext uri="{FF2B5EF4-FFF2-40B4-BE49-F238E27FC236}">
+                <a16:creationId xmlns:a16="http://schemas.microsoft.com/office/drawing/2014/main" id="{85FABFEA-1F6A-7F56-EA7A-F2A5555729E3}"/>
+              </a:ext>
+            </a:extLst>
+          </p:cNvPr>
+          <p:cNvPicPr>
+            <a:picLocks noChangeAspect="1"/>
+          </p:cNvPicPr>
+          <p:nvPr/>
+        </p:nvPicPr>
+        <p:blipFill>
+          <a:blip r:embed="rId3"/>
+          <a:stretch>
+            <a:fillRect/>
+          </a:stretch>
+        </p:blipFill>
+        <p:spPr>
+          <a:xfrm>
+            <a:off x="3044519" y="1199672"/>
+            <a:ext cx="1137648" cy="1137648"/>
+          </a:xfrm>
+          <a:prstGeom prst="rect">
+            <a:avLst/>
+          </a:prstGeom>
+        </p:spPr>
+      </p:pic>
+      <p:pic>
+        <p:nvPicPr>
+          <p:cNvPr id="1028" name="Picture 4" descr="Picture background">
+            <a:extLst>
+              <a:ext uri="{FF2B5EF4-FFF2-40B4-BE49-F238E27FC236}">
+                <a16:creationId xmlns:a16="http://schemas.microsoft.com/office/drawing/2014/main" id="{557E3409-57AA-547A-9661-4FF7E423A2D9}"/>
+              </a:ext>
+            </a:extLst>
+          </p:cNvPr>
+          <p:cNvPicPr>
+            <a:picLocks noChangeAspect="1" noChangeArrowheads="1"/>
+          </p:cNvPicPr>
+          <p:nvPr/>
+        </p:nvPicPr>
+        <p:blipFill>
+          <a:blip r:embed="rId4">
+            <a:extLst>
+              <a:ext uri="{28A0092B-C50C-407E-A947-70E740481C1C}">
+                <a14:useLocalDpi xmlns:a14="http://schemas.microsoft.com/office/drawing/2010/main" val="0"/>
+              </a:ext>
+            </a:extLst>
+          </a:blip>
+          <a:srcRect/>
+          <a:stretch>
+            <a:fillRect/>
+          </a:stretch>
+        </p:blipFill>
+        <p:spPr bwMode="auto">
+          <a:xfrm>
+            <a:off x="2933729" y="2921323"/>
+            <a:ext cx="1427545" cy="1105989"/>
+          </a:xfrm>
+          <a:prstGeom prst="rect">
+            <a:avLst/>
+          </a:prstGeom>
+          <a:noFill/>
+          <a:extLst>
+            <a:ext uri="{909E8E84-426E-40DD-AFC4-6F175D3DCCD1}">
+              <a14:hiddenFill xmlns:a14="http://schemas.microsoft.com/office/drawing/2010/main">
+                <a:solidFill>
+                  <a:srgbClr val="FFFFFF"/>
+                </a:solidFill>
+              </a14:hiddenFill>
+            </a:ext>
+          </a:extLst>
+        </p:spPr>
+      </p:pic>
+      <p:pic>
+        <p:nvPicPr>
+          <p:cNvPr id="1030" name="Picture 6" descr="Picture background">
+            <a:extLst>
+              <a:ext uri="{FF2B5EF4-FFF2-40B4-BE49-F238E27FC236}">
+                <a16:creationId xmlns:a16="http://schemas.microsoft.com/office/drawing/2014/main" id="{BBE892F3-D3F6-8B8C-6805-7A6C7204C1E7}"/>
+              </a:ext>
+            </a:extLst>
+          </p:cNvPr>
+          <p:cNvPicPr>
+            <a:picLocks noChangeAspect="1" noChangeArrowheads="1"/>
+          </p:cNvPicPr>
+          <p:nvPr/>
+        </p:nvPicPr>
+        <p:blipFill>
+          <a:blip r:embed="rId5">
+            <a:extLst>
+              <a:ext uri="{28A0092B-C50C-407E-A947-70E740481C1C}">
+                <a14:useLocalDpi xmlns:a14="http://schemas.microsoft.com/office/drawing/2010/main" val="0"/>
+              </a:ext>
+            </a:extLst>
+          </a:blip>
+          <a:srcRect/>
+          <a:stretch>
+            <a:fillRect/>
+          </a:stretch>
+        </p:blipFill>
+        <p:spPr bwMode="auto">
+          <a:xfrm>
+            <a:off x="7452360" y="1178445"/>
+            <a:ext cx="1143000" cy="1143000"/>
+          </a:xfrm>
+          <a:prstGeom prst="rect">
+            <a:avLst/>
+          </a:prstGeom>
+          <a:noFill/>
+          <a:extLst>
+            <a:ext uri="{909E8E84-426E-40DD-AFC4-6F175D3DCCD1}">
+              <a14:hiddenFill xmlns:a14="http://schemas.microsoft.com/office/drawing/2010/main">
+                <a:solidFill>
+                  <a:srgbClr val="FFFFFF"/>
+                </a:solidFill>
+              </a14:hiddenFill>
+            </a:ext>
+          </a:extLst>
+        </p:spPr>
+      </p:pic>
+      <p:pic>
+        <p:nvPicPr>
+          <p:cNvPr id="1032" name="Picture 8" descr="Picture background">
+            <a:extLst>
+              <a:ext uri="{FF2B5EF4-FFF2-40B4-BE49-F238E27FC236}">
+                <a16:creationId xmlns:a16="http://schemas.microsoft.com/office/drawing/2014/main" id="{2D4ACCA5-4A05-4EAA-8B52-B4BD4EB553D4}"/>
+              </a:ext>
+            </a:extLst>
+          </p:cNvPr>
+          <p:cNvPicPr>
+            <a:picLocks noChangeAspect="1" noChangeArrowheads="1"/>
+          </p:cNvPicPr>
+          <p:nvPr/>
+        </p:nvPicPr>
+        <p:blipFill>
+          <a:blip r:embed="rId6">
+            <a:extLst>
+              <a:ext uri="{28A0092B-C50C-407E-A947-70E740481C1C}">
+                <a14:useLocalDpi xmlns:a14="http://schemas.microsoft.com/office/drawing/2010/main" val="0"/>
+              </a:ext>
+            </a:extLst>
+          </a:blip>
+          <a:srcRect/>
+          <a:stretch>
+            <a:fillRect/>
+          </a:stretch>
+        </p:blipFill>
+        <p:spPr bwMode="auto">
+          <a:xfrm>
+            <a:off x="7505086" y="2918320"/>
+            <a:ext cx="1028071" cy="1060137"/>
+          </a:xfrm>
+          <a:prstGeom prst="rect">
+            <a:avLst/>
+          </a:prstGeom>
+          <a:noFill/>
+          <a:extLst>
+            <a:ext uri="{909E8E84-426E-40DD-AFC4-6F175D3DCCD1}">
+              <a14:hiddenFill xmlns:a14="http://schemas.microsoft.com/office/drawing/2010/main">
+                <a:solidFill>
+                  <a:srgbClr val="FFFFFF"/>
+                </a:solidFill>
+              </a14:hiddenFill>
+            </a:ext>
+          </a:extLst>
+        </p:spPr>
+      </p:pic>
     </p:spTree>
   </p:cSld>
   <p:clrMapOvr>
@@ -9653,39 +10797,14 @@
       </p:sp>
       <p:sp>
         <p:nvSpPr>
-          <p:cNvPr id="6" name="Shape 4"/>
-          <p:cNvSpPr/>
-          <p:nvPr/>
-        </p:nvSpPr>
-        <p:spPr>
-          <a:xfrm>
-            <a:off x="320040" y="868680"/>
-            <a:ext cx="2788920" cy="914400"/>
-          </a:xfrm>
-          <a:prstGeom prst="rect">
-            <a:avLst/>
-          </a:prstGeom>
-          <a:solidFill>
-            <a:srgbClr val="1F3864"/>
-          </a:solidFill>
-          <a:ln w="12700">
-            <a:solidFill>
-              <a:srgbClr val="1F3864"/>
-            </a:solidFill>
-            <a:prstDash val="solid"/>
-          </a:ln>
-        </p:spPr>
-      </p:sp>
-      <p:sp>
-        <p:nvSpPr>
-          <p:cNvPr id="7" name="Text 5"/>
-          <p:cNvSpPr/>
-          <p:nvPr/>
-        </p:nvSpPr>
-        <p:spPr>
-          <a:xfrm>
-            <a:off x="411480" y="960120"/>
-            <a:ext cx="2606040" cy="411480"/>
+          <p:cNvPr id="18" name="Text 16"/>
+          <p:cNvSpPr/>
+          <p:nvPr/>
+        </p:nvSpPr>
+        <p:spPr>
+          <a:xfrm>
+            <a:off x="274320" y="886968"/>
+            <a:ext cx="8412480" cy="320040"/>
           </a:xfrm>
           <a:prstGeom prst="rect">
             <a:avLst/>
@@ -9701,366 +10820,7 @@
               <a:buNone/>
             </a:pPr>
             <a:r>
-              <a:rPr lang="en-US" sz="1300" b="1" dirty="0">
-                <a:solidFill>
-                  <a:srgbClr val="FFFFFF"/>
-                </a:solidFill>
-                <a:latin typeface="Calibri" pitchFamily="34" charset="0"/>
-                <a:ea typeface="Calibri" pitchFamily="34" charset="-122"/>
-                <a:cs typeface="Calibri" pitchFamily="34" charset="-120"/>
-              </a:rPr>
-              <a:t>Аудиторный фонд</a:t>
-            </a:r>
-            <a:endParaRPr lang="en-US" sz="1300" dirty="0"/>
-          </a:p>
-        </p:txBody>
-      </p:sp>
-      <p:sp>
-        <p:nvSpPr>
-          <p:cNvPr id="8" name="Shape 6"/>
-          <p:cNvSpPr/>
-          <p:nvPr/>
-        </p:nvSpPr>
-        <p:spPr>
-          <a:xfrm>
-            <a:off x="320040" y="1783080"/>
-            <a:ext cx="2788920" cy="640080"/>
-          </a:xfrm>
-          <a:prstGeom prst="rect">
-            <a:avLst/>
-          </a:prstGeom>
-          <a:solidFill>
-            <a:srgbClr val="F4F4F4"/>
-          </a:solidFill>
-          <a:ln w="12700">
-            <a:solidFill>
-              <a:srgbClr val="C0C8D8"/>
-            </a:solidFill>
-            <a:prstDash val="solid"/>
-          </a:ln>
-        </p:spPr>
-      </p:sp>
-      <p:sp>
-        <p:nvSpPr>
-          <p:cNvPr id="9" name="Text 7"/>
-          <p:cNvSpPr/>
-          <p:nvPr/>
-        </p:nvSpPr>
-        <p:spPr>
-          <a:xfrm>
-            <a:off x="411480" y="1783080"/>
-            <a:ext cx="2651760" cy="640080"/>
-          </a:xfrm>
-          <a:prstGeom prst="rect">
-            <a:avLst/>
-          </a:prstGeom>
-          <a:noFill/>
-          <a:ln/>
-        </p:spPr>
-        <p:txBody>
-          <a:bodyPr wrap="square" rtlCol="0" anchor="ctr"/>
-          <a:lstStyle/>
-          <a:p>
-            <a:pPr marL="0" indent="0">
-              <a:buNone/>
-            </a:pPr>
-            <a:r>
-              <a:rPr lang="en-US" sz="1100" dirty="0">
-                <a:solidFill>
-                  <a:srgbClr val="1A1A1A"/>
-                </a:solidFill>
-                <a:latin typeface="Calibri" pitchFamily="34" charset="0"/>
-                <a:ea typeface="Calibri" pitchFamily="34" charset="-122"/>
-                <a:cs typeface="Calibri" pitchFamily="34" charset="-120"/>
-              </a:rPr>
-              <a:t>rooms · room_equipment · room_unavailabilities</a:t>
-            </a:r>
-            <a:endParaRPr lang="en-US" sz="1100" dirty="0"/>
-          </a:p>
-        </p:txBody>
-      </p:sp>
-      <p:sp>
-        <p:nvSpPr>
-          <p:cNvPr id="10" name="Shape 8"/>
-          <p:cNvSpPr/>
-          <p:nvPr/>
-        </p:nvSpPr>
-        <p:spPr>
-          <a:xfrm>
-            <a:off x="3246120" y="868680"/>
-            <a:ext cx="2788920" cy="914400"/>
-          </a:xfrm>
-          <a:prstGeom prst="rect">
-            <a:avLst/>
-          </a:prstGeom>
-          <a:solidFill>
-            <a:srgbClr val="2E75B6"/>
-          </a:solidFill>
-          <a:ln w="12700">
-            <a:solidFill>
-              <a:srgbClr val="2E75B6"/>
-            </a:solidFill>
-            <a:prstDash val="solid"/>
-          </a:ln>
-        </p:spPr>
-      </p:sp>
-      <p:sp>
-        <p:nvSpPr>
-          <p:cNvPr id="11" name="Text 9"/>
-          <p:cNvSpPr/>
-          <p:nvPr/>
-        </p:nvSpPr>
-        <p:spPr>
-          <a:xfrm>
-            <a:off x="3337560" y="960120"/>
-            <a:ext cx="2606040" cy="411480"/>
-          </a:xfrm>
-          <a:prstGeom prst="rect">
-            <a:avLst/>
-          </a:prstGeom>
-          <a:noFill/>
-          <a:ln/>
-        </p:spPr>
-        <p:txBody>
-          <a:bodyPr wrap="square" rtlCol="0" anchor="ctr"/>
-          <a:lstStyle/>
-          <a:p>
-            <a:pPr marL="0" indent="0">
-              <a:buNone/>
-            </a:pPr>
-            <a:r>
-              <a:rPr lang="en-US" sz="1300" b="1" dirty="0">
-                <a:solidFill>
-                  <a:srgbClr val="FFFFFF"/>
-                </a:solidFill>
-                <a:latin typeface="Calibri" pitchFamily="34" charset="0"/>
-                <a:ea typeface="Calibri" pitchFamily="34" charset="-122"/>
-                <a:cs typeface="Calibri" pitchFamily="34" charset="-120"/>
-              </a:rPr>
-              <a:t>Учебная нагрузка</a:t>
-            </a:r>
-            <a:endParaRPr lang="en-US" sz="1300" dirty="0"/>
-          </a:p>
-        </p:txBody>
-      </p:sp>
-      <p:sp>
-        <p:nvSpPr>
-          <p:cNvPr id="12" name="Shape 10"/>
-          <p:cNvSpPr/>
-          <p:nvPr/>
-        </p:nvSpPr>
-        <p:spPr>
-          <a:xfrm>
-            <a:off x="3246120" y="1783080"/>
-            <a:ext cx="2788920" cy="640080"/>
-          </a:xfrm>
-          <a:prstGeom prst="rect">
-            <a:avLst/>
-          </a:prstGeom>
-          <a:solidFill>
-            <a:srgbClr val="F4F4F4"/>
-          </a:solidFill>
-          <a:ln w="12700">
-            <a:solidFill>
-              <a:srgbClr val="C0C8D8"/>
-            </a:solidFill>
-            <a:prstDash val="solid"/>
-          </a:ln>
-        </p:spPr>
-      </p:sp>
-      <p:sp>
-        <p:nvSpPr>
-          <p:cNvPr id="13" name="Text 11"/>
-          <p:cNvSpPr/>
-          <p:nvPr/>
-        </p:nvSpPr>
-        <p:spPr>
-          <a:xfrm>
-            <a:off x="3337560" y="1783080"/>
-            <a:ext cx="2651760" cy="640080"/>
-          </a:xfrm>
-          <a:prstGeom prst="rect">
-            <a:avLst/>
-          </a:prstGeom>
-          <a:noFill/>
-          <a:ln/>
-        </p:spPr>
-        <p:txBody>
-          <a:bodyPr wrap="square" rtlCol="0" anchor="ctr"/>
-          <a:lstStyle/>
-          <a:p>
-            <a:pPr marL="0" indent="0">
-              <a:buNone/>
-            </a:pPr>
-            <a:r>
-              <a:rPr lang="en-US" sz="1100" dirty="0">
-                <a:solidFill>
-                  <a:srgbClr val="1A1A1A"/>
-                </a:solidFill>
-                <a:latin typeface="Calibri" pitchFamily="34" charset="0"/>
-                <a:ea typeface="Calibri" pitchFamily="34" charset="-122"/>
-                <a:cs typeface="Calibri" pitchFamily="34" charset="-120"/>
-              </a:rPr>
-              <a:t>teachers · groups · subgroups · lessons · teacher_unavailabilities</a:t>
-            </a:r>
-            <a:endParaRPr lang="en-US" sz="1100" dirty="0"/>
-          </a:p>
-        </p:txBody>
-      </p:sp>
-      <p:sp>
-        <p:nvSpPr>
-          <p:cNvPr id="14" name="Shape 12"/>
-          <p:cNvSpPr/>
-          <p:nvPr/>
-        </p:nvSpPr>
-        <p:spPr>
-          <a:xfrm>
-            <a:off x="6172200" y="868680"/>
-            <a:ext cx="2788920" cy="914400"/>
-          </a:xfrm>
-          <a:prstGeom prst="rect">
-            <a:avLst/>
-          </a:prstGeom>
-          <a:solidFill>
-            <a:srgbClr val="0070C0"/>
-          </a:solidFill>
-          <a:ln w="12700">
-            <a:solidFill>
-              <a:srgbClr val="0070C0"/>
-            </a:solidFill>
-            <a:prstDash val="solid"/>
-          </a:ln>
-        </p:spPr>
-      </p:sp>
-      <p:sp>
-        <p:nvSpPr>
-          <p:cNvPr id="15" name="Text 13"/>
-          <p:cNvSpPr/>
-          <p:nvPr/>
-        </p:nvSpPr>
-        <p:spPr>
-          <a:xfrm>
-            <a:off x="6263640" y="960120"/>
-            <a:ext cx="2606040" cy="411480"/>
-          </a:xfrm>
-          <a:prstGeom prst="rect">
-            <a:avLst/>
-          </a:prstGeom>
-          <a:noFill/>
-          <a:ln/>
-        </p:spPr>
-        <p:txBody>
-          <a:bodyPr wrap="square" rtlCol="0" anchor="ctr"/>
-          <a:lstStyle/>
-          <a:p>
-            <a:pPr marL="0" indent="0">
-              <a:buNone/>
-            </a:pPr>
-            <a:r>
-              <a:rPr lang="en-US" sz="1300" b="1" dirty="0">
-                <a:solidFill>
-                  <a:srgbClr val="FFFFFF"/>
-                </a:solidFill>
-                <a:latin typeface="Calibri" pitchFamily="34" charset="0"/>
-                <a:ea typeface="Calibri" pitchFamily="34" charset="-122"/>
-                <a:cs typeface="Calibri" pitchFamily="34" charset="-120"/>
-              </a:rPr>
-              <a:t>Расписание</a:t>
-            </a:r>
-            <a:endParaRPr lang="en-US" sz="1300" dirty="0"/>
-          </a:p>
-        </p:txBody>
-      </p:sp>
-      <p:sp>
-        <p:nvSpPr>
-          <p:cNvPr id="16" name="Shape 14"/>
-          <p:cNvSpPr/>
-          <p:nvPr/>
-        </p:nvSpPr>
-        <p:spPr>
-          <a:xfrm>
-            <a:off x="6172200" y="1783080"/>
-            <a:ext cx="2788920" cy="640080"/>
-          </a:xfrm>
-          <a:prstGeom prst="rect">
-            <a:avLst/>
-          </a:prstGeom>
-          <a:solidFill>
-            <a:srgbClr val="F4F4F4"/>
-          </a:solidFill>
-          <a:ln w="12700">
-            <a:solidFill>
-              <a:srgbClr val="C0C8D8"/>
-            </a:solidFill>
-            <a:prstDash val="solid"/>
-          </a:ln>
-        </p:spPr>
-      </p:sp>
-      <p:sp>
-        <p:nvSpPr>
-          <p:cNvPr id="17" name="Text 15"/>
-          <p:cNvSpPr/>
-          <p:nvPr/>
-        </p:nvSpPr>
-        <p:spPr>
-          <a:xfrm>
-            <a:off x="6263640" y="1783080"/>
-            <a:ext cx="2651760" cy="640080"/>
-          </a:xfrm>
-          <a:prstGeom prst="rect">
-            <a:avLst/>
-          </a:prstGeom>
-          <a:noFill/>
-          <a:ln/>
-        </p:spPr>
-        <p:txBody>
-          <a:bodyPr wrap="square" rtlCol="0" anchor="ctr"/>
-          <a:lstStyle/>
-          <a:p>
-            <a:pPr marL="0" indent="0">
-              <a:buNone/>
-            </a:pPr>
-            <a:r>
-              <a:rPr lang="en-US" sz="1100" dirty="0">
-                <a:solidFill>
-                  <a:srgbClr val="1A1A1A"/>
-                </a:solidFill>
-                <a:latin typeface="Calibri" pitchFamily="34" charset="0"/>
-                <a:ea typeface="Calibri" pitchFamily="34" charset="-122"/>
-                <a:cs typeface="Calibri" pitchFamily="34" charset="-120"/>
-              </a:rPr>
-              <a:t>schedules · schedule_entries · time_slots</a:t>
-            </a:r>
-            <a:endParaRPr lang="en-US" sz="1100" dirty="0"/>
-          </a:p>
-        </p:txBody>
-      </p:sp>
-      <p:sp>
-        <p:nvSpPr>
-          <p:cNvPr id="18" name="Text 16"/>
-          <p:cNvSpPr/>
-          <p:nvPr/>
-        </p:nvSpPr>
-        <p:spPr>
-          <a:xfrm>
-            <a:off x="365760" y="2606040"/>
-            <a:ext cx="8412480" cy="320040"/>
-          </a:xfrm>
-          <a:prstGeom prst="rect">
-            <a:avLst/>
-          </a:prstGeom>
-          <a:noFill/>
-          <a:ln/>
-        </p:spPr>
-        <p:txBody>
-          <a:bodyPr wrap="square" rtlCol="0" anchor="ctr"/>
-          <a:lstStyle/>
-          <a:p>
-            <a:pPr marL="0" indent="0">
-              <a:buNone/>
-            </a:pPr>
-            <a:r>
-              <a:rPr lang="en-US" sz="1300" b="1" dirty="0">
+              <a:rPr lang="en-US" sz="2000" b="1" dirty="0">
                 <a:solidFill>
                   <a:srgbClr val="1F3864"/>
                 </a:solidFill>
@@ -10070,7 +10830,7 @@
               </a:rPr>
               <a:t>Ключевые технические решения:</a:t>
             </a:r>
-            <a:endParaRPr lang="en-US" sz="1300" dirty="0"/>
+            <a:endParaRPr lang="en-US" sz="2000" dirty="0"/>
           </a:p>
         </p:txBody>
       </p:sp>
@@ -10082,7 +10842,7 @@
         </p:nvSpPr>
         <p:spPr>
           <a:xfrm>
-            <a:off x="365760" y="2971800"/>
+            <a:off x="274320" y="1728869"/>
             <a:ext cx="8412480" cy="1737360"/>
           </a:xfrm>
           <a:prstGeom prst="rect">
@@ -10103,7 +10863,7 @@
               <a:buChar char="•"/>
             </a:pPr>
             <a:r>
-              <a:rPr lang="en-US" sz="1250" dirty="0">
+              <a:rPr lang="en-US" sz="2000" dirty="0">
                 <a:solidFill>
                   <a:srgbClr val="1A1A1A"/>
                 </a:solidFill>
@@ -10113,7 +10873,7 @@
               </a:rPr>
               <a:t>ORM Entity Framework Core — типобезопасная работа с данными</a:t>
             </a:r>
-            <a:endParaRPr lang="en-US" sz="1250" dirty="0"/>
+            <a:endParaRPr lang="en-US" sz="2000" dirty="0"/>
           </a:p>
           <a:p>
             <a:pPr marL="342900" indent="-342900">
@@ -10124,7 +10884,7 @@
               <a:buChar char="•"/>
             </a:pPr>
             <a:r>
-              <a:rPr lang="en-US" sz="1250" dirty="0">
+              <a:rPr lang="en-US" sz="2000" dirty="0">
                 <a:solidFill>
                   <a:srgbClr val="1A1A1A"/>
                 </a:solidFill>
@@ -10134,7 +10894,7 @@
               </a:rPr>
               <a:t>Транзакции с изоляцией SERIALIZABLE — исключают коллизии при параллельной записи</a:t>
             </a:r>
-            <a:endParaRPr lang="en-US" sz="1250" dirty="0"/>
+            <a:endParaRPr lang="en-US" sz="2000" dirty="0"/>
           </a:p>
           <a:p>
             <a:pPr marL="342900" indent="-342900">
@@ -10145,7 +10905,7 @@
               <a:buChar char="•"/>
             </a:pPr>
             <a:r>
-              <a:rPr lang="en-US" sz="1250" dirty="0">
+              <a:rPr lang="en-US" sz="2000" dirty="0">
                 <a:solidFill>
                   <a:srgbClr val="1A1A1A"/>
                 </a:solidFill>
@@ -10155,7 +10915,7 @@
               </a:rPr>
               <a:t>Миграции схемы — версионируемые изменения структуры БД</a:t>
             </a:r>
-            <a:endParaRPr lang="en-US" sz="1250" dirty="0"/>
+            <a:endParaRPr lang="en-US" sz="2000" dirty="0"/>
           </a:p>
           <a:p>
             <a:pPr marL="342900" indent="-342900">
@@ -10166,7 +10926,7 @@
               <a:buChar char="•"/>
             </a:pPr>
             <a:r>
-              <a:rPr lang="en-US" sz="1250" dirty="0">
+              <a:rPr lang="en-US" sz="2000" dirty="0">
                 <a:solidFill>
                   <a:srgbClr val="1A1A1A"/>
                 </a:solidFill>
@@ -10176,7 +10936,7 @@
               </a:rPr>
               <a:t>Нормализованная реляционная модель — отсутствие дублирования данных</a:t>
             </a:r>
-            <a:endParaRPr lang="en-US" sz="1250" dirty="0"/>
+            <a:endParaRPr lang="en-US" sz="2000" dirty="0"/>
           </a:p>
         </p:txBody>
       </p:sp>
@@ -10302,7 +11062,7 @@
               <a:buNone/>
             </a:pPr>
             <a:r>
-              <a:rPr lang="en-US" sz="1100" dirty="0">
+              <a:rPr lang="ru-RU" sz="1100" dirty="0">
                 <a:solidFill>
                   <a:srgbClr val="BFBFBF"/>
                 </a:solidFill>
@@ -10310,7 +11070,7 @@
                 <a:ea typeface="Calibri" pitchFamily="34" charset="-122"/>
                 <a:cs typeface="Calibri" pitchFamily="34" charset="-120"/>
               </a:rPr>
-              <a:t>10</a:t>
+              <a:t>9</a:t>
             </a:r>
             <a:endParaRPr lang="en-US" sz="1100" dirty="0"/>
           </a:p>
